--- a/public/lessons/year-6-maths/autumn/week-2/round-to-ten-hundred-and-thousand/teaching-powerpoint-v1.pptx
+++ b/public/lessons/year-6-maths/autumn/week-2/round-to-ten-hundred-and-thousand/teaching-powerpoint-v1.pptx
@@ -2,24 +2,24 @@
 <file path=ppt/presentation.xml><?xml version="1.0" encoding="utf-8"?>
 <p:presentation xmlns:p="http://schemas.openxmlformats.org/presentationml/2006/main">
   <p:sldMasterIdLst>
-    <p:sldMasterId xmlns:r="http://schemas.openxmlformats.org/officeDocument/2006/relationships" id="2147483648" r:id="Rf36cf92741084bce"/>
+    <p:sldMasterId xmlns:r="http://schemas.openxmlformats.org/officeDocument/2006/relationships" id="2147483648" r:id="R337575bdbd1b4aa8"/>
   </p:sldMasterIdLst>
   <p:notesMasterIdLst>
-    <p:notesMasterId xmlns:r="http://schemas.openxmlformats.org/officeDocument/2006/relationships" r:id="R2abdb5a236ee4278"/>
+    <p:notesMasterId xmlns:r="http://schemas.openxmlformats.org/officeDocument/2006/relationships" r:id="R2bd8418d651d4df1"/>
   </p:notesMasterIdLst>
   <p:sldIdLst>
-    <p:sldId xmlns:r="http://schemas.openxmlformats.org/officeDocument/2006/relationships" id="256" r:id="Ra0a5608051284b6e"/>
-    <p:sldId xmlns:r="http://schemas.openxmlformats.org/officeDocument/2006/relationships" id="257" r:id="Re9cea509763c419e"/>
-    <p:sldId xmlns:r="http://schemas.openxmlformats.org/officeDocument/2006/relationships" id="258" r:id="R2c51234831ae42b7"/>
-    <p:sldId xmlns:r="http://schemas.openxmlformats.org/officeDocument/2006/relationships" id="259" r:id="R18cacc9c74344ba9"/>
-    <p:sldId xmlns:r="http://schemas.openxmlformats.org/officeDocument/2006/relationships" id="260" r:id="R3685b2aa6c5d41d6"/>
-    <p:sldId xmlns:r="http://schemas.openxmlformats.org/officeDocument/2006/relationships" id="261" r:id="R61537dd0f7aa4099"/>
-    <p:sldId xmlns:r="http://schemas.openxmlformats.org/officeDocument/2006/relationships" id="262" r:id="Rf130d31dea544645"/>
-    <p:sldId xmlns:r="http://schemas.openxmlformats.org/officeDocument/2006/relationships" id="263" r:id="Rb7cd1577d1b44f4c"/>
-    <p:sldId xmlns:r="http://schemas.openxmlformats.org/officeDocument/2006/relationships" id="264" r:id="R9fa94f723f3a47fe"/>
-    <p:sldId xmlns:r="http://schemas.openxmlformats.org/officeDocument/2006/relationships" id="265" r:id="R76008031d522419b"/>
-    <p:sldId xmlns:r="http://schemas.openxmlformats.org/officeDocument/2006/relationships" id="266" r:id="R8ae4719c3955403e"/>
-    <p:sldId xmlns:r="http://schemas.openxmlformats.org/officeDocument/2006/relationships" id="267" r:id="R93367c6463f9451f"/>
+    <p:sldId xmlns:r="http://schemas.openxmlformats.org/officeDocument/2006/relationships" id="256" r:id="R2b1c435c7eee4065"/>
+    <p:sldId xmlns:r="http://schemas.openxmlformats.org/officeDocument/2006/relationships" id="257" r:id="R3e618a88c96e40a0"/>
+    <p:sldId xmlns:r="http://schemas.openxmlformats.org/officeDocument/2006/relationships" id="258" r:id="Rd5ac583e48424123"/>
+    <p:sldId xmlns:r="http://schemas.openxmlformats.org/officeDocument/2006/relationships" id="259" r:id="Raa8ee657fbf445b8"/>
+    <p:sldId xmlns:r="http://schemas.openxmlformats.org/officeDocument/2006/relationships" id="260" r:id="Rff8b2b00ab6a48c1"/>
+    <p:sldId xmlns:r="http://schemas.openxmlformats.org/officeDocument/2006/relationships" id="261" r:id="Rf31fc29c86c2485f"/>
+    <p:sldId xmlns:r="http://schemas.openxmlformats.org/officeDocument/2006/relationships" id="262" r:id="Rad63b83f5b3944b6"/>
+    <p:sldId xmlns:r="http://schemas.openxmlformats.org/officeDocument/2006/relationships" id="263" r:id="R9f0c4053b1634708"/>
+    <p:sldId xmlns:r="http://schemas.openxmlformats.org/officeDocument/2006/relationships" id="264" r:id="R6d9bfcdb6274400b"/>
+    <p:sldId xmlns:r="http://schemas.openxmlformats.org/officeDocument/2006/relationships" id="265" r:id="R2edc215dea104e70"/>
+    <p:sldId xmlns:r="http://schemas.openxmlformats.org/officeDocument/2006/relationships" id="266" r:id="R9dbaf3a920ab47c3"/>
+    <p:sldId xmlns:r="http://schemas.openxmlformats.org/officeDocument/2006/relationships" id="267" r:id="Rfdc5cc91049648e6"/>
   </p:sldIdLst>
   <p:sldSz cx="12192000" cy="6858000"/>
   <p:notesSz cx="6858000" cy="9144000"/>
@@ -873,7 +873,7 @@
           <a:lstStyle xmlns:a="http://schemas.openxmlformats.org/drawingml/2006/main"/>
           <a:p xmlns:a="http://schemas.openxmlformats.org/drawingml/2006/main">
             <a:r>
-              <a:t>I do. Reveal the question, setup and each calculation stage one click at a time. Pupils watch before copying. Model answer: 468,750; 468,800; 469,000.</a:t>
+              <a:t>I do. Reveal the question, then reveal each mathematical change one click at a time. Point to the numbers and operation that changed before moving to the next line. Final answer: 468,750; 468,800; 469,000.</a:t>
             </a:r>
           </a:p>
         </p:txBody>
@@ -1291,7 +1291,7 @@
   </p:cSld>
   <p:clrMap bg1="lt1" tx1="dk1" bg2="lt2" tx2="dk2" accent1="accent1" accent2="accent2" accent3="accent3" accent4="accent4" accent5="accent5" accent6="accent6" hlink="hlink" folHlink="folHlink"/>
   <p:sldLayoutIdLst>
-    <p:sldLayoutId xmlns:r="http://schemas.openxmlformats.org/officeDocument/2006/relationships" id="2147483649" r:id="R4c5d302c9e4c4c96"/>
+    <p:sldLayoutId xmlns:r="http://schemas.openxmlformats.org/officeDocument/2006/relationships" id="2147483649" r:id="R1c1dcb93cdab4d73"/>
   </p:sldLayoutIdLst>
   <p:txStyles>
     <p:titleStyle>
@@ -1842,7 +1842,7 @@
           <p:cNvPr id="12" name="">
             <a:extLst xmlns:a="http://schemas.openxmlformats.org/drawingml/2006/main">
               <a:ext uri="{FF2B5EF4-FFF2-40B4-BE49-F238E27FC236}">
-                <a16:creationId xmlns:a16="http://schemas.microsoft.com/office/drawing/2014/main" id="{61384505-D075-4765-BC59-5F36E21B4B0A}"/>
+                <a16:creationId xmlns:a16="http://schemas.microsoft.com/office/drawing/2014/main" id="{54277015-152F-4E62-BE56-C9B20C20B2F7}"/>
               </a:ext>
             </a:extLst>
           </p:cNvPr>
@@ -1874,7 +1874,7 @@
           <p:cNvPr id="2" name="">
             <a:extLst xmlns:a="http://schemas.openxmlformats.org/drawingml/2006/main">
               <a:ext uri="{FF2B5EF4-FFF2-40B4-BE49-F238E27FC236}">
-                <a16:creationId xmlns:a16="http://schemas.microsoft.com/office/drawing/2014/main" id="{43D48835-E45B-4EA0-A065-8DF790E9C5FA}"/>
+                <a16:creationId xmlns:a16="http://schemas.microsoft.com/office/drawing/2014/main" id="{BE129F51-9358-49F1-A7F4-B037DBC29716}"/>
               </a:ext>
             </a:extLst>
           </p:cNvPr>
@@ -1931,7 +1931,7 @@
           <p:cNvPr id="3" name="">
             <a:extLst xmlns:a="http://schemas.openxmlformats.org/drawingml/2006/main">
               <a:ext uri="{FF2B5EF4-FFF2-40B4-BE49-F238E27FC236}">
-                <a16:creationId xmlns:a16="http://schemas.microsoft.com/office/drawing/2014/main" id="{1741CE3A-BA77-466C-B02B-2FB1E1A85DB5}"/>
+                <a16:creationId xmlns:a16="http://schemas.microsoft.com/office/drawing/2014/main" id="{0E53522F-02CB-4230-BEDD-7B81DD7F4FCD}"/>
               </a:ext>
             </a:extLst>
           </p:cNvPr>
@@ -1965,7 +1965,7 @@
           <p:cNvPr id="4" name="">
             <a:extLst xmlns:a="http://schemas.openxmlformats.org/drawingml/2006/main">
               <a:ext uri="{FF2B5EF4-FFF2-40B4-BE49-F238E27FC236}">
-                <a16:creationId xmlns:a16="http://schemas.microsoft.com/office/drawing/2014/main" id="{B2824005-E3BC-4174-9B49-CB4BA8ED4129}"/>
+                <a16:creationId xmlns:a16="http://schemas.microsoft.com/office/drawing/2014/main" id="{3E1E15C6-D069-4AA0-B2CD-6D9FFEC46792}"/>
               </a:ext>
             </a:extLst>
           </p:cNvPr>
@@ -2022,7 +2022,7 @@
           <p:cNvPr id="5" name="">
             <a:extLst xmlns:a="http://schemas.openxmlformats.org/drawingml/2006/main">
               <a:ext uri="{FF2B5EF4-FFF2-40B4-BE49-F238E27FC236}">
-                <a16:creationId xmlns:a16="http://schemas.microsoft.com/office/drawing/2014/main" id="{F4E05FE9-471A-434A-A7E5-E79895F83DBA}"/>
+                <a16:creationId xmlns:a16="http://schemas.microsoft.com/office/drawing/2014/main" id="{5A3F1E53-08A4-4DD9-BA84-5086C470DDE6}"/>
               </a:ext>
             </a:extLst>
           </p:cNvPr>
@@ -2079,7 +2079,7 @@
           <p:cNvPr id="6" name="">
             <a:extLst xmlns:a="http://schemas.openxmlformats.org/drawingml/2006/main">
               <a:ext uri="{FF2B5EF4-FFF2-40B4-BE49-F238E27FC236}">
-                <a16:creationId xmlns:a16="http://schemas.microsoft.com/office/drawing/2014/main" id="{ECB3CABA-B218-456C-A4ED-67397CC91706}"/>
+                <a16:creationId xmlns:a16="http://schemas.microsoft.com/office/drawing/2014/main" id="{31575D43-07F9-4356-9FD6-EB342AAAD67D}"/>
               </a:ext>
             </a:extLst>
           </p:cNvPr>
@@ -2113,7 +2113,7 @@
           <p:cNvPr id="7" name="">
             <a:extLst xmlns:a="http://schemas.openxmlformats.org/drawingml/2006/main">
               <a:ext uri="{FF2B5EF4-FFF2-40B4-BE49-F238E27FC236}">
-                <a16:creationId xmlns:a16="http://schemas.microsoft.com/office/drawing/2014/main" id="{294AEA0A-C18B-4FF6-A5E3-896C9316BDCC}"/>
+                <a16:creationId xmlns:a16="http://schemas.microsoft.com/office/drawing/2014/main" id="{8E26353F-C582-42D9-902E-7029A0E91FB7}"/>
               </a:ext>
             </a:extLst>
           </p:cNvPr>
@@ -2170,7 +2170,7 @@
           <p:cNvPr id="8" name="">
             <a:extLst xmlns:a="http://schemas.openxmlformats.org/drawingml/2006/main">
               <a:ext uri="{FF2B5EF4-FFF2-40B4-BE49-F238E27FC236}">
-                <a16:creationId xmlns:a16="http://schemas.microsoft.com/office/drawing/2014/main" id="{C6CA86FC-C903-4C53-AC14-1F2818F9ED95}"/>
+                <a16:creationId xmlns:a16="http://schemas.microsoft.com/office/drawing/2014/main" id="{FBA255BD-75DC-4F74-B974-4B41D183D1A8}"/>
               </a:ext>
             </a:extLst>
           </p:cNvPr>
@@ -2227,7 +2227,7 @@
           <p:cNvPr id="9" name="">
             <a:extLst xmlns:a="http://schemas.openxmlformats.org/drawingml/2006/main">
               <a:ext uri="{FF2B5EF4-FFF2-40B4-BE49-F238E27FC236}">
-                <a16:creationId xmlns:a16="http://schemas.microsoft.com/office/drawing/2014/main" id="{513EB4A3-5F3A-4152-84B3-6ACE1D375171}"/>
+                <a16:creationId xmlns:a16="http://schemas.microsoft.com/office/drawing/2014/main" id="{C452DB6A-46EE-425E-8ADC-F9CD4F5E16DA}"/>
               </a:ext>
             </a:extLst>
           </p:cNvPr>
@@ -2284,7 +2284,7 @@
           <p:cNvPr id="10" name="">
             <a:extLst xmlns:a="http://schemas.openxmlformats.org/drawingml/2006/main">
               <a:ext uri="{FF2B5EF4-FFF2-40B4-BE49-F238E27FC236}">
-                <a16:creationId xmlns:a16="http://schemas.microsoft.com/office/drawing/2014/main" id="{3F2DAA71-FC97-4077-96FC-FBC94EF2BF36}"/>
+                <a16:creationId xmlns:a16="http://schemas.microsoft.com/office/drawing/2014/main" id="{C81357CD-6AE3-4F00-97AF-758FA4B58233}"/>
               </a:ext>
             </a:extLst>
           </p:cNvPr>
@@ -2341,7 +2341,7 @@
           <p:cNvPr id="11" name="">
             <a:extLst xmlns:a="http://schemas.openxmlformats.org/drawingml/2006/main">
               <a:ext uri="{FF2B5EF4-FFF2-40B4-BE49-F238E27FC236}">
-                <a16:creationId xmlns:a16="http://schemas.microsoft.com/office/drawing/2014/main" id="{83CE184F-66C9-49CB-BE07-74DDB49860E0}"/>
+                <a16:creationId xmlns:a16="http://schemas.microsoft.com/office/drawing/2014/main" id="{EACAEC3B-C8DA-4B8D-B064-FEE55A9EF8FB}"/>
               </a:ext>
             </a:extLst>
           </p:cNvPr>
@@ -2396,7 +2396,7 @@
     </p:spTree>
     <p:extLst>
       <p:ext uri="{BB962C8B-B14F-4D97-AF65-F5344CB8AC3E}">
-        <p14:creationId xmlns:p14="http://schemas.microsoft.com/office/powerpoint/2010/main" val="871862142"/>
+        <p14:creationId xmlns:p14="http://schemas.microsoft.com/office/powerpoint/2010/main" val="1570208085"/>
       </p:ext>
     </p:extLst>
   </p:cSld>
@@ -2427,7 +2427,7 @@
           <p:cNvPr id="14" name="">
             <a:extLst xmlns:a="http://schemas.openxmlformats.org/drawingml/2006/main">
               <a:ext uri="{FF2B5EF4-FFF2-40B4-BE49-F238E27FC236}">
-                <a16:creationId xmlns:a16="http://schemas.microsoft.com/office/drawing/2014/main" id="{D8EE5CF2-7F65-4111-88BB-FCBC4771039B}"/>
+                <a16:creationId xmlns:a16="http://schemas.microsoft.com/office/drawing/2014/main" id="{0F6056D3-374C-47F4-B0F9-5D6D7143E70B}"/>
               </a:ext>
             </a:extLst>
           </p:cNvPr>
@@ -2459,7 +2459,7 @@
           <p:cNvPr id="2" name="">
             <a:extLst xmlns:a="http://schemas.openxmlformats.org/drawingml/2006/main">
               <a:ext uri="{FF2B5EF4-FFF2-40B4-BE49-F238E27FC236}">
-                <a16:creationId xmlns:a16="http://schemas.microsoft.com/office/drawing/2014/main" id="{E8E20082-896C-4654-90AF-A7FDA7E925E5}"/>
+                <a16:creationId xmlns:a16="http://schemas.microsoft.com/office/drawing/2014/main" id="{896809AC-06CE-41FF-9E1A-FE57341500F8}"/>
               </a:ext>
             </a:extLst>
           </p:cNvPr>
@@ -2516,7 +2516,7 @@
           <p:cNvPr id="3" name="">
             <a:extLst xmlns:a="http://schemas.openxmlformats.org/drawingml/2006/main">
               <a:ext uri="{FF2B5EF4-FFF2-40B4-BE49-F238E27FC236}">
-                <a16:creationId xmlns:a16="http://schemas.microsoft.com/office/drawing/2014/main" id="{1CB77549-BB22-4C2A-9E8E-A40621338029}"/>
+                <a16:creationId xmlns:a16="http://schemas.microsoft.com/office/drawing/2014/main" id="{D00F4610-2F8D-4085-A24F-6F4AC7F1088B}"/>
               </a:ext>
             </a:extLst>
           </p:cNvPr>
@@ -2548,7 +2548,7 @@
           <p:cNvPr id="4" name="">
             <a:extLst xmlns:a="http://schemas.openxmlformats.org/drawingml/2006/main">
               <a:ext uri="{FF2B5EF4-FFF2-40B4-BE49-F238E27FC236}">
-                <a16:creationId xmlns:a16="http://schemas.microsoft.com/office/drawing/2014/main" id="{5B1C446B-C555-45E2-B71E-9ABFE99705DC}"/>
+                <a16:creationId xmlns:a16="http://schemas.microsoft.com/office/drawing/2014/main" id="{D5653B09-33C7-4053-88DC-DD6A027EC7F5}"/>
               </a:ext>
             </a:extLst>
           </p:cNvPr>
@@ -2605,7 +2605,7 @@
           <p:cNvPr id="5" name="">
             <a:extLst xmlns:a="http://schemas.openxmlformats.org/drawingml/2006/main">
               <a:ext uri="{FF2B5EF4-FFF2-40B4-BE49-F238E27FC236}">
-                <a16:creationId xmlns:a16="http://schemas.microsoft.com/office/drawing/2014/main" id="{8F9010BC-FB67-47EE-8874-46C4D39C4246}"/>
+                <a16:creationId xmlns:a16="http://schemas.microsoft.com/office/drawing/2014/main" id="{2D94BAF8-39B7-47FA-BFD3-B67ABA7FE74E}"/>
               </a:ext>
             </a:extLst>
           </p:cNvPr>
@@ -2662,7 +2662,7 @@
           <p:cNvPr id="6" name="">
             <a:extLst xmlns:a="http://schemas.openxmlformats.org/drawingml/2006/main">
               <a:ext uri="{FF2B5EF4-FFF2-40B4-BE49-F238E27FC236}">
-                <a16:creationId xmlns:a16="http://schemas.microsoft.com/office/drawing/2014/main" id="{839D093B-234D-4AEA-AE27-5B1B487193D8}"/>
+                <a16:creationId xmlns:a16="http://schemas.microsoft.com/office/drawing/2014/main" id="{DD39C513-CDD2-4449-A43B-10A185640EA2}"/>
               </a:ext>
             </a:extLst>
           </p:cNvPr>
@@ -2719,7 +2719,7 @@
           <p:cNvPr id="7" name="">
             <a:extLst xmlns:a="http://schemas.openxmlformats.org/drawingml/2006/main">
               <a:ext uri="{FF2B5EF4-FFF2-40B4-BE49-F238E27FC236}">
-                <a16:creationId xmlns:a16="http://schemas.microsoft.com/office/drawing/2014/main" id="{A02B257D-1054-4CD3-9870-B4DC2F63C738}"/>
+                <a16:creationId xmlns:a16="http://schemas.microsoft.com/office/drawing/2014/main" id="{A032E552-18B5-4F51-8C3F-F070DE7621E7}"/>
               </a:ext>
             </a:extLst>
           </p:cNvPr>
@@ -2751,7 +2751,7 @@
           <p:cNvPr id="8" name="">
             <a:extLst xmlns:a="http://schemas.openxmlformats.org/drawingml/2006/main">
               <a:ext uri="{FF2B5EF4-FFF2-40B4-BE49-F238E27FC236}">
-                <a16:creationId xmlns:a16="http://schemas.microsoft.com/office/drawing/2014/main" id="{3D746BB1-7A66-4483-98AB-5B9AFBBBA7DD}"/>
+                <a16:creationId xmlns:a16="http://schemas.microsoft.com/office/drawing/2014/main" id="{B1558758-D252-41E3-B477-EFED797CD706}"/>
               </a:ext>
             </a:extLst>
           </p:cNvPr>
@@ -2808,7 +2808,7 @@
           <p:cNvPr id="9" name="">
             <a:extLst xmlns:a="http://schemas.openxmlformats.org/drawingml/2006/main">
               <a:ext uri="{FF2B5EF4-FFF2-40B4-BE49-F238E27FC236}">
-                <a16:creationId xmlns:a16="http://schemas.microsoft.com/office/drawing/2014/main" id="{200F8B32-CA1C-4ABE-8FAC-1BC4832D7EE4}"/>
+                <a16:creationId xmlns:a16="http://schemas.microsoft.com/office/drawing/2014/main" id="{47E2D43E-7FB9-4CCF-AC93-FA2E0ADAC6B6}"/>
               </a:ext>
             </a:extLst>
           </p:cNvPr>
@@ -2865,7 +2865,7 @@
           <p:cNvPr id="10" name="">
             <a:extLst xmlns:a="http://schemas.openxmlformats.org/drawingml/2006/main">
               <a:ext uri="{FF2B5EF4-FFF2-40B4-BE49-F238E27FC236}">
-                <a16:creationId xmlns:a16="http://schemas.microsoft.com/office/drawing/2014/main" id="{627329CB-A2D5-43F8-A347-163963937F66}"/>
+                <a16:creationId xmlns:a16="http://schemas.microsoft.com/office/drawing/2014/main" id="{91306927-13E3-4F99-B38D-00BA898892C9}"/>
               </a:ext>
             </a:extLst>
           </p:cNvPr>
@@ -2922,7 +2922,7 @@
           <p:cNvPr id="11" name="">
             <a:extLst xmlns:a="http://schemas.openxmlformats.org/drawingml/2006/main">
               <a:ext uri="{FF2B5EF4-FFF2-40B4-BE49-F238E27FC236}">
-                <a16:creationId xmlns:a16="http://schemas.microsoft.com/office/drawing/2014/main" id="{28961BD7-8CB8-4512-ADA8-AEC420B384BB}"/>
+                <a16:creationId xmlns:a16="http://schemas.microsoft.com/office/drawing/2014/main" id="{3373EFB2-B109-47EB-8BD7-8EAB40C4C432}"/>
               </a:ext>
             </a:extLst>
           </p:cNvPr>
@@ -2979,7 +2979,7 @@
           <p:cNvPr id="12" name="">
             <a:extLst xmlns:a="http://schemas.openxmlformats.org/drawingml/2006/main">
               <a:ext uri="{FF2B5EF4-FFF2-40B4-BE49-F238E27FC236}">
-                <a16:creationId xmlns:a16="http://schemas.microsoft.com/office/drawing/2014/main" id="{FE5161F7-F108-482D-B15B-A96FEBE55714}"/>
+                <a16:creationId xmlns:a16="http://schemas.microsoft.com/office/drawing/2014/main" id="{7608175E-A1BD-4F6D-9AFD-260FB96148E6}"/>
               </a:ext>
             </a:extLst>
           </p:cNvPr>
@@ -3036,7 +3036,7 @@
           <p:cNvPr id="13" name="">
             <a:extLst xmlns:a="http://schemas.openxmlformats.org/drawingml/2006/main">
               <a:ext uri="{FF2B5EF4-FFF2-40B4-BE49-F238E27FC236}">
-                <a16:creationId xmlns:a16="http://schemas.microsoft.com/office/drawing/2014/main" id="{C9303973-D4F7-45BE-B744-35C5FD4B5026}"/>
+                <a16:creationId xmlns:a16="http://schemas.microsoft.com/office/drawing/2014/main" id="{63A1B2B2-5FC2-4547-A856-475E1ACF0C86}"/>
               </a:ext>
             </a:extLst>
           </p:cNvPr>
@@ -3091,7 +3091,7 @@
     </p:spTree>
     <p:extLst>
       <p:ext uri="{BB962C8B-B14F-4D97-AF65-F5344CB8AC3E}">
-        <p14:creationId xmlns:p14="http://schemas.microsoft.com/office/powerpoint/2010/main" val="302331425"/>
+        <p14:creationId xmlns:p14="http://schemas.microsoft.com/office/powerpoint/2010/main" val="4326106"/>
       </p:ext>
     </p:extLst>
   </p:cSld>
@@ -3292,7 +3292,7 @@
           <p:cNvPr id="19" name="">
             <a:extLst xmlns:a="http://schemas.openxmlformats.org/drawingml/2006/main">
               <a:ext uri="{FF2B5EF4-FFF2-40B4-BE49-F238E27FC236}">
-                <a16:creationId xmlns:a16="http://schemas.microsoft.com/office/drawing/2014/main" id="{77D8DE65-BF84-4F51-910D-670ED678F8F8}"/>
+                <a16:creationId xmlns:a16="http://schemas.microsoft.com/office/drawing/2014/main" id="{D06E2F1E-6F41-4F3C-9594-E2EF71626FF2}"/>
               </a:ext>
             </a:extLst>
           </p:cNvPr>
@@ -3324,7 +3324,7 @@
           <p:cNvPr id="2" name="">
             <a:extLst xmlns:a="http://schemas.openxmlformats.org/drawingml/2006/main">
               <a:ext uri="{FF2B5EF4-FFF2-40B4-BE49-F238E27FC236}">
-                <a16:creationId xmlns:a16="http://schemas.microsoft.com/office/drawing/2014/main" id="{DD1E1874-2FB9-4FE0-B3DE-481DD7B45AA5}"/>
+                <a16:creationId xmlns:a16="http://schemas.microsoft.com/office/drawing/2014/main" id="{C42E5F99-D134-4A3D-8169-B34098248075}"/>
               </a:ext>
             </a:extLst>
           </p:cNvPr>
@@ -3381,7 +3381,7 @@
           <p:cNvPr id="3" name="">
             <a:extLst xmlns:a="http://schemas.openxmlformats.org/drawingml/2006/main">
               <a:ext uri="{FF2B5EF4-FFF2-40B4-BE49-F238E27FC236}">
-                <a16:creationId xmlns:a16="http://schemas.microsoft.com/office/drawing/2014/main" id="{4C903DCE-1333-4AE8-9B32-0C96E9B69FC0}"/>
+                <a16:creationId xmlns:a16="http://schemas.microsoft.com/office/drawing/2014/main" id="{F0427902-99CE-44E9-8A05-1D3829534A72}"/>
               </a:ext>
             </a:extLst>
           </p:cNvPr>
@@ -3413,7 +3413,7 @@
           <p:cNvPr id="4" name="">
             <a:extLst xmlns:a="http://schemas.openxmlformats.org/drawingml/2006/main">
               <a:ext uri="{FF2B5EF4-FFF2-40B4-BE49-F238E27FC236}">
-                <a16:creationId xmlns:a16="http://schemas.microsoft.com/office/drawing/2014/main" id="{9E156387-3636-49D9-A985-FAF87E6CFB3C}"/>
+                <a16:creationId xmlns:a16="http://schemas.microsoft.com/office/drawing/2014/main" id="{D3E42AD8-3F34-49D6-8FD2-4AB0EC89FEA9}"/>
               </a:ext>
             </a:extLst>
           </p:cNvPr>
@@ -3470,7 +3470,7 @@
           <p:cNvPr id="5" name="">
             <a:extLst xmlns:a="http://schemas.openxmlformats.org/drawingml/2006/main">
               <a:ext uri="{FF2B5EF4-FFF2-40B4-BE49-F238E27FC236}">
-                <a16:creationId xmlns:a16="http://schemas.microsoft.com/office/drawing/2014/main" id="{D43ED5A6-4907-43BD-99EF-99EA7CB4AB7E}"/>
+                <a16:creationId xmlns:a16="http://schemas.microsoft.com/office/drawing/2014/main" id="{F9D2A72B-44F4-4268-96E5-49EF710506E1}"/>
               </a:ext>
             </a:extLst>
           </p:cNvPr>
@@ -3527,7 +3527,7 @@
           <p:cNvPr id="6" name="">
             <a:extLst xmlns:a="http://schemas.openxmlformats.org/drawingml/2006/main">
               <a:ext uri="{FF2B5EF4-FFF2-40B4-BE49-F238E27FC236}">
-                <a16:creationId xmlns:a16="http://schemas.microsoft.com/office/drawing/2014/main" id="{2548B12C-3040-408E-BB90-FA3A8020D6DC}"/>
+                <a16:creationId xmlns:a16="http://schemas.microsoft.com/office/drawing/2014/main" id="{C684D053-453C-4694-8752-1730DC53A837}"/>
               </a:ext>
             </a:extLst>
           </p:cNvPr>
@@ -3584,7 +3584,7 @@
           <p:cNvPr id="7" name="">
             <a:extLst xmlns:a="http://schemas.openxmlformats.org/drawingml/2006/main">
               <a:ext uri="{FF2B5EF4-FFF2-40B4-BE49-F238E27FC236}">
-                <a16:creationId xmlns:a16="http://schemas.microsoft.com/office/drawing/2014/main" id="{B31C7354-2CC4-4253-8208-933930E8E729}"/>
+                <a16:creationId xmlns:a16="http://schemas.microsoft.com/office/drawing/2014/main" id="{0DCB27FE-E4AB-43F8-A67D-EDF09BA927E0}"/>
               </a:ext>
             </a:extLst>
           </p:cNvPr>
@@ -3616,7 +3616,7 @@
           <p:cNvPr id="8" name="">
             <a:extLst xmlns:a="http://schemas.openxmlformats.org/drawingml/2006/main">
               <a:ext uri="{FF2B5EF4-FFF2-40B4-BE49-F238E27FC236}">
-                <a16:creationId xmlns:a16="http://schemas.microsoft.com/office/drawing/2014/main" id="{020F69C7-2F6A-4D9A-827F-7EBD8F537432}"/>
+                <a16:creationId xmlns:a16="http://schemas.microsoft.com/office/drawing/2014/main" id="{9CE0BB56-C2F2-4899-BBC4-90E374A89931}"/>
               </a:ext>
             </a:extLst>
           </p:cNvPr>
@@ -3673,7 +3673,7 @@
           <p:cNvPr id="9" name="">
             <a:extLst xmlns:a="http://schemas.openxmlformats.org/drawingml/2006/main">
               <a:ext uri="{FF2B5EF4-FFF2-40B4-BE49-F238E27FC236}">
-                <a16:creationId xmlns:a16="http://schemas.microsoft.com/office/drawing/2014/main" id="{09B9FF76-F37D-414C-B009-225E66BAA77D}"/>
+                <a16:creationId xmlns:a16="http://schemas.microsoft.com/office/drawing/2014/main" id="{25952F9A-FA01-4E7F-944D-CF8297B448B2}"/>
               </a:ext>
             </a:extLst>
           </p:cNvPr>
@@ -3730,7 +3730,7 @@
           <p:cNvPr id="10" name="">
             <a:extLst xmlns:a="http://schemas.openxmlformats.org/drawingml/2006/main">
               <a:ext uri="{FF2B5EF4-FFF2-40B4-BE49-F238E27FC236}">
-                <a16:creationId xmlns:a16="http://schemas.microsoft.com/office/drawing/2014/main" id="{06ABA2E4-7BDB-4849-9018-70C54FA447E4}"/>
+                <a16:creationId xmlns:a16="http://schemas.microsoft.com/office/drawing/2014/main" id="{09E09205-A7FD-42A1-BA56-0427831DB5C1}"/>
               </a:ext>
             </a:extLst>
           </p:cNvPr>
@@ -3787,7 +3787,7 @@
           <p:cNvPr id="11" name="">
             <a:extLst xmlns:a="http://schemas.openxmlformats.org/drawingml/2006/main">
               <a:ext uri="{FF2B5EF4-FFF2-40B4-BE49-F238E27FC236}">
-                <a16:creationId xmlns:a16="http://schemas.microsoft.com/office/drawing/2014/main" id="{231DDE98-9BCD-4DE7-B635-F04B45598652}"/>
+                <a16:creationId xmlns:a16="http://schemas.microsoft.com/office/drawing/2014/main" id="{D0E2E179-E645-4CFB-8451-5C621AAB7894}"/>
               </a:ext>
             </a:extLst>
           </p:cNvPr>
@@ -3821,7 +3821,7 @@
           <p:cNvPr id="12" name="">
             <a:extLst xmlns:a="http://schemas.openxmlformats.org/drawingml/2006/main">
               <a:ext uri="{FF2B5EF4-FFF2-40B4-BE49-F238E27FC236}">
-                <a16:creationId xmlns:a16="http://schemas.microsoft.com/office/drawing/2014/main" id="{65467B64-81B4-447E-B73B-6FEDDD9E4B01}"/>
+                <a16:creationId xmlns:a16="http://schemas.microsoft.com/office/drawing/2014/main" id="{4EA818BF-7848-47E1-A34E-CF9CB541900E}"/>
               </a:ext>
             </a:extLst>
           </p:cNvPr>
@@ -3878,7 +3878,7 @@
           <p:cNvPr id="13" name="">
             <a:extLst xmlns:a="http://schemas.openxmlformats.org/drawingml/2006/main">
               <a:ext uri="{FF2B5EF4-FFF2-40B4-BE49-F238E27FC236}">
-                <a16:creationId xmlns:a16="http://schemas.microsoft.com/office/drawing/2014/main" id="{DF0890A8-0720-44DA-BB43-EC7FE87F1702}"/>
+                <a16:creationId xmlns:a16="http://schemas.microsoft.com/office/drawing/2014/main" id="{AA99A4AF-589F-442E-A4EE-8B60512D5B37}"/>
               </a:ext>
             </a:extLst>
           </p:cNvPr>
@@ -3935,7 +3935,7 @@
           <p:cNvPr id="14" name="">
             <a:extLst xmlns:a="http://schemas.openxmlformats.org/drawingml/2006/main">
               <a:ext uri="{FF2B5EF4-FFF2-40B4-BE49-F238E27FC236}">
-                <a16:creationId xmlns:a16="http://schemas.microsoft.com/office/drawing/2014/main" id="{8C79E140-5084-4734-8C67-06F676AF66C3}"/>
+                <a16:creationId xmlns:a16="http://schemas.microsoft.com/office/drawing/2014/main" id="{F5B686E4-8AB8-4F95-AD09-70C06866629E}"/>
               </a:ext>
             </a:extLst>
           </p:cNvPr>
@@ -3992,7 +3992,7 @@
           <p:cNvPr id="15" name="">
             <a:extLst xmlns:a="http://schemas.openxmlformats.org/drawingml/2006/main">
               <a:ext uri="{FF2B5EF4-FFF2-40B4-BE49-F238E27FC236}">
-                <a16:creationId xmlns:a16="http://schemas.microsoft.com/office/drawing/2014/main" id="{CF91101E-E2AE-43CF-A478-85BE60B7E39E}"/>
+                <a16:creationId xmlns:a16="http://schemas.microsoft.com/office/drawing/2014/main" id="{3CF0FCAC-1781-46E1-AD31-7F91FB3D308E}"/>
               </a:ext>
             </a:extLst>
           </p:cNvPr>
@@ -4026,7 +4026,7 @@
           <p:cNvPr id="16" name="">
             <a:extLst xmlns:a="http://schemas.openxmlformats.org/drawingml/2006/main">
               <a:ext uri="{FF2B5EF4-FFF2-40B4-BE49-F238E27FC236}">
-                <a16:creationId xmlns:a16="http://schemas.microsoft.com/office/drawing/2014/main" id="{E95DEB9D-96C4-4F53-9F80-EC51CB0E06DD}"/>
+                <a16:creationId xmlns:a16="http://schemas.microsoft.com/office/drawing/2014/main" id="{55C7D60F-52EE-43D2-9780-41E999B7E7CD}"/>
               </a:ext>
             </a:extLst>
           </p:cNvPr>
@@ -4083,7 +4083,7 @@
           <p:cNvPr id="17" name="">
             <a:extLst xmlns:a="http://schemas.openxmlformats.org/drawingml/2006/main">
               <a:ext uri="{FF2B5EF4-FFF2-40B4-BE49-F238E27FC236}">
-                <a16:creationId xmlns:a16="http://schemas.microsoft.com/office/drawing/2014/main" id="{242EA94F-59BB-4E09-8BA7-74214716D57A}"/>
+                <a16:creationId xmlns:a16="http://schemas.microsoft.com/office/drawing/2014/main" id="{D18599AB-D121-4691-B5C0-8067C84A2C01}"/>
               </a:ext>
             </a:extLst>
           </p:cNvPr>
@@ -4140,7 +4140,7 @@
           <p:cNvPr id="18" name="">
             <a:extLst xmlns:a="http://schemas.openxmlformats.org/drawingml/2006/main">
               <a:ext uri="{FF2B5EF4-FFF2-40B4-BE49-F238E27FC236}">
-                <a16:creationId xmlns:a16="http://schemas.microsoft.com/office/drawing/2014/main" id="{C1B5275D-6B47-4E3F-A840-3CAEBB5887C8}"/>
+                <a16:creationId xmlns:a16="http://schemas.microsoft.com/office/drawing/2014/main" id="{342C0C85-42CF-480D-B72D-4F25025F917D}"/>
               </a:ext>
             </a:extLst>
           </p:cNvPr>
@@ -4195,7 +4195,7 @@
     </p:spTree>
     <p:extLst>
       <p:ext uri="{BB962C8B-B14F-4D97-AF65-F5344CB8AC3E}">
-        <p14:creationId xmlns:p14="http://schemas.microsoft.com/office/powerpoint/2010/main" val="1434437314"/>
+        <p14:creationId xmlns:p14="http://schemas.microsoft.com/office/powerpoint/2010/main" val="2057385395"/>
       </p:ext>
     </p:extLst>
   </p:cSld>
@@ -4350,7 +4350,7 @@
           <p:cNvPr id="23" name="">
             <a:extLst xmlns:a="http://schemas.openxmlformats.org/drawingml/2006/main">
               <a:ext uri="{FF2B5EF4-FFF2-40B4-BE49-F238E27FC236}">
-                <a16:creationId xmlns:a16="http://schemas.microsoft.com/office/drawing/2014/main" id="{76A3AFA3-4ECF-4618-B734-657941AA85CC}"/>
+                <a16:creationId xmlns:a16="http://schemas.microsoft.com/office/drawing/2014/main" id="{E1068972-6F86-41D4-A203-BBA4572AE48A}"/>
               </a:ext>
             </a:extLst>
           </p:cNvPr>
@@ -4382,7 +4382,7 @@
           <p:cNvPr id="2" name="">
             <a:extLst xmlns:a="http://schemas.openxmlformats.org/drawingml/2006/main">
               <a:ext uri="{FF2B5EF4-FFF2-40B4-BE49-F238E27FC236}">
-                <a16:creationId xmlns:a16="http://schemas.microsoft.com/office/drawing/2014/main" id="{690A8DC1-E793-4B83-888F-71570068664F}"/>
+                <a16:creationId xmlns:a16="http://schemas.microsoft.com/office/drawing/2014/main" id="{EEF4A58F-729E-4FE4-8FDA-7521194B2B73}"/>
               </a:ext>
             </a:extLst>
           </p:cNvPr>
@@ -4439,7 +4439,7 @@
           <p:cNvPr id="3" name="">
             <a:extLst xmlns:a="http://schemas.openxmlformats.org/drawingml/2006/main">
               <a:ext uri="{FF2B5EF4-FFF2-40B4-BE49-F238E27FC236}">
-                <a16:creationId xmlns:a16="http://schemas.microsoft.com/office/drawing/2014/main" id="{AAE65A28-8552-4FDF-9205-201C2BB1BF8B}"/>
+                <a16:creationId xmlns:a16="http://schemas.microsoft.com/office/drawing/2014/main" id="{F306D030-E788-4FBA-8AA6-C94027281558}"/>
               </a:ext>
             </a:extLst>
           </p:cNvPr>
@@ -4471,7 +4471,7 @@
           <p:cNvPr id="4" name="">
             <a:extLst xmlns:a="http://schemas.openxmlformats.org/drawingml/2006/main">
               <a:ext uri="{FF2B5EF4-FFF2-40B4-BE49-F238E27FC236}">
-                <a16:creationId xmlns:a16="http://schemas.microsoft.com/office/drawing/2014/main" id="{59A57712-C63F-4D50-BBC6-9E571AD6AD01}"/>
+                <a16:creationId xmlns:a16="http://schemas.microsoft.com/office/drawing/2014/main" id="{4C8E2673-EB96-4B27-B2C3-C036BD3D64F1}"/>
               </a:ext>
             </a:extLst>
           </p:cNvPr>
@@ -4528,7 +4528,7 @@
           <p:cNvPr id="5" name="">
             <a:extLst xmlns:a="http://schemas.openxmlformats.org/drawingml/2006/main">
               <a:ext uri="{FF2B5EF4-FFF2-40B4-BE49-F238E27FC236}">
-                <a16:creationId xmlns:a16="http://schemas.microsoft.com/office/drawing/2014/main" id="{A7C48722-9D7C-4405-80AD-452D59822883}"/>
+                <a16:creationId xmlns:a16="http://schemas.microsoft.com/office/drawing/2014/main" id="{C5A1E883-4049-461D-84E9-D33F2365BC59}"/>
               </a:ext>
             </a:extLst>
           </p:cNvPr>
@@ -4585,7 +4585,7 @@
           <p:cNvPr id="6" name="">
             <a:extLst xmlns:a="http://schemas.openxmlformats.org/drawingml/2006/main">
               <a:ext uri="{FF2B5EF4-FFF2-40B4-BE49-F238E27FC236}">
-                <a16:creationId xmlns:a16="http://schemas.microsoft.com/office/drawing/2014/main" id="{5658C9CD-EF7D-435F-9CF9-F4BF9C8E2D7C}"/>
+                <a16:creationId xmlns:a16="http://schemas.microsoft.com/office/drawing/2014/main" id="{BA047115-A77F-43BD-AF9F-6B286A7A6E89}"/>
               </a:ext>
             </a:extLst>
           </p:cNvPr>
@@ -4642,7 +4642,7 @@
           <p:cNvPr id="7" name="">
             <a:extLst xmlns:a="http://schemas.openxmlformats.org/drawingml/2006/main">
               <a:ext uri="{FF2B5EF4-FFF2-40B4-BE49-F238E27FC236}">
-                <a16:creationId xmlns:a16="http://schemas.microsoft.com/office/drawing/2014/main" id="{3A0C765C-3FEB-455B-8032-03FEB3091F65}"/>
+                <a16:creationId xmlns:a16="http://schemas.microsoft.com/office/drawing/2014/main" id="{63AA5F99-C035-4EE7-8824-CF8856E9BF74}"/>
               </a:ext>
             </a:extLst>
           </p:cNvPr>
@@ -4674,7 +4674,7 @@
           <p:cNvPr id="8" name="">
             <a:extLst xmlns:a="http://schemas.openxmlformats.org/drawingml/2006/main">
               <a:ext uri="{FF2B5EF4-FFF2-40B4-BE49-F238E27FC236}">
-                <a16:creationId xmlns:a16="http://schemas.microsoft.com/office/drawing/2014/main" id="{7BAC0C35-5FCE-40D0-9AA8-FCFDC9D11788}"/>
+                <a16:creationId xmlns:a16="http://schemas.microsoft.com/office/drawing/2014/main" id="{6378FEBF-857F-49B9-8659-51F16F287B1B}"/>
               </a:ext>
             </a:extLst>
           </p:cNvPr>
@@ -4731,7 +4731,7 @@
           <p:cNvPr id="9" name="">
             <a:extLst xmlns:a="http://schemas.openxmlformats.org/drawingml/2006/main">
               <a:ext uri="{FF2B5EF4-FFF2-40B4-BE49-F238E27FC236}">
-                <a16:creationId xmlns:a16="http://schemas.microsoft.com/office/drawing/2014/main" id="{D67F8CEA-D7F9-4E5B-93CD-F590B191E789}"/>
+                <a16:creationId xmlns:a16="http://schemas.microsoft.com/office/drawing/2014/main" id="{4A2701C5-52C6-42BB-AFF6-56D7E5F1F7E5}"/>
               </a:ext>
             </a:extLst>
           </p:cNvPr>
@@ -4788,7 +4788,7 @@
           <p:cNvPr id="10" name="">
             <a:extLst xmlns:a="http://schemas.openxmlformats.org/drawingml/2006/main">
               <a:ext uri="{FF2B5EF4-FFF2-40B4-BE49-F238E27FC236}">
-                <a16:creationId xmlns:a16="http://schemas.microsoft.com/office/drawing/2014/main" id="{30B3C516-7B84-4C86-8226-11C6748C96D1}"/>
+                <a16:creationId xmlns:a16="http://schemas.microsoft.com/office/drawing/2014/main" id="{8020272E-276E-4CBE-AC50-9E2F0A40FDF4}"/>
               </a:ext>
             </a:extLst>
           </p:cNvPr>
@@ -4822,7 +4822,7 @@
           <p:cNvPr id="11" name="">
             <a:extLst xmlns:a="http://schemas.openxmlformats.org/drawingml/2006/main">
               <a:ext uri="{FF2B5EF4-FFF2-40B4-BE49-F238E27FC236}">
-                <a16:creationId xmlns:a16="http://schemas.microsoft.com/office/drawing/2014/main" id="{2129B788-9E01-48B5-BA34-7C18ACB1E98A}"/>
+                <a16:creationId xmlns:a16="http://schemas.microsoft.com/office/drawing/2014/main" id="{A0521601-99EB-4D43-B196-82F01D161621}"/>
               </a:ext>
             </a:extLst>
           </p:cNvPr>
@@ -4854,7 +4854,7 @@
           <p:cNvPr id="12" name="">
             <a:extLst xmlns:a="http://schemas.openxmlformats.org/drawingml/2006/main">
               <a:ext uri="{FF2B5EF4-FFF2-40B4-BE49-F238E27FC236}">
-                <a16:creationId xmlns:a16="http://schemas.microsoft.com/office/drawing/2014/main" id="{9097B4A1-7CA9-439A-B352-C4764EB3DDEA}"/>
+                <a16:creationId xmlns:a16="http://schemas.microsoft.com/office/drawing/2014/main" id="{EC39C06F-5434-4CE2-91C3-A525B235D6A1}"/>
               </a:ext>
             </a:extLst>
           </p:cNvPr>
@@ -4911,7 +4911,7 @@
           <p:cNvPr id="13" name="">
             <a:extLst xmlns:a="http://schemas.openxmlformats.org/drawingml/2006/main">
               <a:ext uri="{FF2B5EF4-FFF2-40B4-BE49-F238E27FC236}">
-                <a16:creationId xmlns:a16="http://schemas.microsoft.com/office/drawing/2014/main" id="{F090DEC4-3D5D-4AC2-9F1B-DAD33A7E1B97}"/>
+                <a16:creationId xmlns:a16="http://schemas.microsoft.com/office/drawing/2014/main" id="{44BE1769-3476-4330-96F7-4B128806D049}"/>
               </a:ext>
             </a:extLst>
           </p:cNvPr>
@@ -4968,7 +4968,7 @@
           <p:cNvPr id="14" name="">
             <a:extLst xmlns:a="http://schemas.openxmlformats.org/drawingml/2006/main">
               <a:ext uri="{FF2B5EF4-FFF2-40B4-BE49-F238E27FC236}">
-                <a16:creationId xmlns:a16="http://schemas.microsoft.com/office/drawing/2014/main" id="{22D2BC0A-C6B6-486D-953B-BA537ABE5610}"/>
+                <a16:creationId xmlns:a16="http://schemas.microsoft.com/office/drawing/2014/main" id="{D6A648B6-EDAD-4EB2-88F6-425B8E652818}"/>
               </a:ext>
             </a:extLst>
           </p:cNvPr>
@@ -5002,7 +5002,7 @@
           <p:cNvPr id="15" name="">
             <a:extLst xmlns:a="http://schemas.openxmlformats.org/drawingml/2006/main">
               <a:ext uri="{FF2B5EF4-FFF2-40B4-BE49-F238E27FC236}">
-                <a16:creationId xmlns:a16="http://schemas.microsoft.com/office/drawing/2014/main" id="{DF9B6728-A18B-4F5A-B72B-30323E95FC2C}"/>
+                <a16:creationId xmlns:a16="http://schemas.microsoft.com/office/drawing/2014/main" id="{D1B95375-1840-46CC-818B-789561158CBC}"/>
               </a:ext>
             </a:extLst>
           </p:cNvPr>
@@ -5034,7 +5034,7 @@
           <p:cNvPr id="16" name="">
             <a:extLst xmlns:a="http://schemas.openxmlformats.org/drawingml/2006/main">
               <a:ext uri="{FF2B5EF4-FFF2-40B4-BE49-F238E27FC236}">
-                <a16:creationId xmlns:a16="http://schemas.microsoft.com/office/drawing/2014/main" id="{65828285-AA8F-431C-8C51-7844DF448628}"/>
+                <a16:creationId xmlns:a16="http://schemas.microsoft.com/office/drawing/2014/main" id="{A48E51CD-52D1-4823-A365-6E7702C682D0}"/>
               </a:ext>
             </a:extLst>
           </p:cNvPr>
@@ -5091,7 +5091,7 @@
           <p:cNvPr id="17" name="">
             <a:extLst xmlns:a="http://schemas.openxmlformats.org/drawingml/2006/main">
               <a:ext uri="{FF2B5EF4-FFF2-40B4-BE49-F238E27FC236}">
-                <a16:creationId xmlns:a16="http://schemas.microsoft.com/office/drawing/2014/main" id="{82DE66B9-4F9D-4017-9435-00FC71E1BDA7}"/>
+                <a16:creationId xmlns:a16="http://schemas.microsoft.com/office/drawing/2014/main" id="{7BC7953D-918E-452C-A990-A86C49E27867}"/>
               </a:ext>
             </a:extLst>
           </p:cNvPr>
@@ -5148,7 +5148,7 @@
           <p:cNvPr id="18" name="">
             <a:extLst xmlns:a="http://schemas.openxmlformats.org/drawingml/2006/main">
               <a:ext uri="{FF2B5EF4-FFF2-40B4-BE49-F238E27FC236}">
-                <a16:creationId xmlns:a16="http://schemas.microsoft.com/office/drawing/2014/main" id="{5794C4CA-353F-42DA-9242-B8983F128E4D}"/>
+                <a16:creationId xmlns:a16="http://schemas.microsoft.com/office/drawing/2014/main" id="{00F1C519-7E8C-4353-8222-816DC56E450B}"/>
               </a:ext>
             </a:extLst>
           </p:cNvPr>
@@ -5182,7 +5182,7 @@
           <p:cNvPr id="19" name="">
             <a:extLst xmlns:a="http://schemas.openxmlformats.org/drawingml/2006/main">
               <a:ext uri="{FF2B5EF4-FFF2-40B4-BE49-F238E27FC236}">
-                <a16:creationId xmlns:a16="http://schemas.microsoft.com/office/drawing/2014/main" id="{088FF6CD-501B-4E16-B9D5-2AE9C6D91D05}"/>
+                <a16:creationId xmlns:a16="http://schemas.microsoft.com/office/drawing/2014/main" id="{F5D2EE16-175F-4343-A4A2-9EC268F0E8A7}"/>
               </a:ext>
             </a:extLst>
           </p:cNvPr>
@@ -5214,7 +5214,7 @@
           <p:cNvPr id="20" name="">
             <a:extLst xmlns:a="http://schemas.openxmlformats.org/drawingml/2006/main">
               <a:ext uri="{FF2B5EF4-FFF2-40B4-BE49-F238E27FC236}">
-                <a16:creationId xmlns:a16="http://schemas.microsoft.com/office/drawing/2014/main" id="{C6414B9D-7EC7-4B46-9E05-B8A37603C51D}"/>
+                <a16:creationId xmlns:a16="http://schemas.microsoft.com/office/drawing/2014/main" id="{E0DF3382-8113-48A7-841A-BD9D91E15985}"/>
               </a:ext>
             </a:extLst>
           </p:cNvPr>
@@ -5271,7 +5271,7 @@
           <p:cNvPr id="21" name="">
             <a:extLst xmlns:a="http://schemas.openxmlformats.org/drawingml/2006/main">
               <a:ext uri="{FF2B5EF4-FFF2-40B4-BE49-F238E27FC236}">
-                <a16:creationId xmlns:a16="http://schemas.microsoft.com/office/drawing/2014/main" id="{1B3B43A5-AE6A-4A78-8D96-AE504D4F9BC8}"/>
+                <a16:creationId xmlns:a16="http://schemas.microsoft.com/office/drawing/2014/main" id="{653EA279-AA39-4B5B-A236-627A228E06AB}"/>
               </a:ext>
             </a:extLst>
           </p:cNvPr>
@@ -5328,7 +5328,7 @@
           <p:cNvPr id="22" name="">
             <a:extLst xmlns:a="http://schemas.openxmlformats.org/drawingml/2006/main">
               <a:ext uri="{FF2B5EF4-FFF2-40B4-BE49-F238E27FC236}">
-                <a16:creationId xmlns:a16="http://schemas.microsoft.com/office/drawing/2014/main" id="{912435A3-BA5B-4F12-A74C-D6C14F7B40A3}"/>
+                <a16:creationId xmlns:a16="http://schemas.microsoft.com/office/drawing/2014/main" id="{4FF429A6-E5A9-41D3-A8A5-644321B18704}"/>
               </a:ext>
             </a:extLst>
           </p:cNvPr>
@@ -5383,7 +5383,7 @@
     </p:spTree>
     <p:extLst>
       <p:ext uri="{BB962C8B-B14F-4D97-AF65-F5344CB8AC3E}">
-        <p14:creationId xmlns:p14="http://schemas.microsoft.com/office/powerpoint/2010/main" val="1174685442"/>
+        <p14:creationId xmlns:p14="http://schemas.microsoft.com/office/powerpoint/2010/main" val="412773316"/>
       </p:ext>
     </p:extLst>
   </p:cSld>
@@ -5584,7 +5584,7 @@
           <p:cNvPr id="23" name="">
             <a:extLst xmlns:a="http://schemas.openxmlformats.org/drawingml/2006/main">
               <a:ext uri="{FF2B5EF4-FFF2-40B4-BE49-F238E27FC236}">
-                <a16:creationId xmlns:a16="http://schemas.microsoft.com/office/drawing/2014/main" id="{AECBE8B3-7843-4431-BBC3-B32F4EB3248D}"/>
+                <a16:creationId xmlns:a16="http://schemas.microsoft.com/office/drawing/2014/main" id="{2388B663-FA07-41B4-B183-4205368D58B8}"/>
               </a:ext>
             </a:extLst>
           </p:cNvPr>
@@ -5616,7 +5616,7 @@
           <p:cNvPr id="2" name="">
             <a:extLst xmlns:a="http://schemas.openxmlformats.org/drawingml/2006/main">
               <a:ext uri="{FF2B5EF4-FFF2-40B4-BE49-F238E27FC236}">
-                <a16:creationId xmlns:a16="http://schemas.microsoft.com/office/drawing/2014/main" id="{FCE338AB-07EA-49F9-8C6C-4DA81310664D}"/>
+                <a16:creationId xmlns:a16="http://schemas.microsoft.com/office/drawing/2014/main" id="{F0F76B77-460E-494C-91CE-39F88112C876}"/>
               </a:ext>
             </a:extLst>
           </p:cNvPr>
@@ -5673,7 +5673,7 @@
           <p:cNvPr id="3" name="">
             <a:extLst xmlns:a="http://schemas.openxmlformats.org/drawingml/2006/main">
               <a:ext uri="{FF2B5EF4-FFF2-40B4-BE49-F238E27FC236}">
-                <a16:creationId xmlns:a16="http://schemas.microsoft.com/office/drawing/2014/main" id="{A1D2199E-A30F-40C9-B859-2AD8996175DB}"/>
+                <a16:creationId xmlns:a16="http://schemas.microsoft.com/office/drawing/2014/main" id="{4D048F95-52CC-4E93-984A-1F696EFF33F3}"/>
               </a:ext>
             </a:extLst>
           </p:cNvPr>
@@ -5705,7 +5705,7 @@
           <p:cNvPr id="4" name="">
             <a:extLst xmlns:a="http://schemas.openxmlformats.org/drawingml/2006/main">
               <a:ext uri="{FF2B5EF4-FFF2-40B4-BE49-F238E27FC236}">
-                <a16:creationId xmlns:a16="http://schemas.microsoft.com/office/drawing/2014/main" id="{BBA35BC5-99CD-4E8D-8F43-E0DDB45B5FB8}"/>
+                <a16:creationId xmlns:a16="http://schemas.microsoft.com/office/drawing/2014/main" id="{FF4BEB31-5BC0-4C41-898F-13FEE9920F01}"/>
               </a:ext>
             </a:extLst>
           </p:cNvPr>
@@ -5762,7 +5762,7 @@
           <p:cNvPr id="5" name="">
             <a:extLst xmlns:a="http://schemas.openxmlformats.org/drawingml/2006/main">
               <a:ext uri="{FF2B5EF4-FFF2-40B4-BE49-F238E27FC236}">
-                <a16:creationId xmlns:a16="http://schemas.microsoft.com/office/drawing/2014/main" id="{BE562CEF-DCAA-4F09-AE76-E00DD5694A8F}"/>
+                <a16:creationId xmlns:a16="http://schemas.microsoft.com/office/drawing/2014/main" id="{F84AB253-8968-4AE6-8B92-0E5F9E5A3EAB}"/>
               </a:ext>
             </a:extLst>
           </p:cNvPr>
@@ -5819,7 +5819,7 @@
           <p:cNvPr id="6" name="">
             <a:extLst xmlns:a="http://schemas.openxmlformats.org/drawingml/2006/main">
               <a:ext uri="{FF2B5EF4-FFF2-40B4-BE49-F238E27FC236}">
-                <a16:creationId xmlns:a16="http://schemas.microsoft.com/office/drawing/2014/main" id="{C6AEC1CF-AC4C-4FA3-9972-941544C01DFB}"/>
+                <a16:creationId xmlns:a16="http://schemas.microsoft.com/office/drawing/2014/main" id="{40F962A0-A9A1-41DB-B7E0-1EF1A670C695}"/>
               </a:ext>
             </a:extLst>
           </p:cNvPr>
@@ -5876,7 +5876,7 @@
           <p:cNvPr id="7" name="">
             <a:extLst xmlns:a="http://schemas.openxmlformats.org/drawingml/2006/main">
               <a:ext uri="{FF2B5EF4-FFF2-40B4-BE49-F238E27FC236}">
-                <a16:creationId xmlns:a16="http://schemas.microsoft.com/office/drawing/2014/main" id="{19F74F9B-B5C6-4A5C-9CE0-7BDB9F547B51}"/>
+                <a16:creationId xmlns:a16="http://schemas.microsoft.com/office/drawing/2014/main" id="{53DA6173-32C7-495D-847E-27502D3495BE}"/>
               </a:ext>
             </a:extLst>
           </p:cNvPr>
@@ -5908,7 +5908,7 @@
           <p:cNvPr id="8" name="">
             <a:extLst xmlns:a="http://schemas.openxmlformats.org/drawingml/2006/main">
               <a:ext uri="{FF2B5EF4-FFF2-40B4-BE49-F238E27FC236}">
-                <a16:creationId xmlns:a16="http://schemas.microsoft.com/office/drawing/2014/main" id="{7E24846C-65E2-47F6-9DE4-3A6B2EBF79B2}"/>
+                <a16:creationId xmlns:a16="http://schemas.microsoft.com/office/drawing/2014/main" id="{CFC40D72-FE24-4912-8995-4A0AC4BBFB02}"/>
               </a:ext>
             </a:extLst>
           </p:cNvPr>
@@ -5965,7 +5965,7 @@
           <p:cNvPr id="9" name="">
             <a:extLst xmlns:a="http://schemas.openxmlformats.org/drawingml/2006/main">
               <a:ext uri="{FF2B5EF4-FFF2-40B4-BE49-F238E27FC236}">
-                <a16:creationId xmlns:a16="http://schemas.microsoft.com/office/drawing/2014/main" id="{3B97368F-8746-4D51-89B7-857D34DF1354}"/>
+                <a16:creationId xmlns:a16="http://schemas.microsoft.com/office/drawing/2014/main" id="{9C25E69F-DAB3-4C36-BD59-6B3E30E1DA57}"/>
               </a:ext>
             </a:extLst>
           </p:cNvPr>
@@ -6022,7 +6022,7 @@
           <p:cNvPr id="10" name="">
             <a:extLst xmlns:a="http://schemas.openxmlformats.org/drawingml/2006/main">
               <a:ext uri="{FF2B5EF4-FFF2-40B4-BE49-F238E27FC236}">
-                <a16:creationId xmlns:a16="http://schemas.microsoft.com/office/drawing/2014/main" id="{6E069384-871B-4B66-B0E9-0294B7E4C4C9}"/>
+                <a16:creationId xmlns:a16="http://schemas.microsoft.com/office/drawing/2014/main" id="{DD88B70F-6B3F-4E78-A314-1A7E73533125}"/>
               </a:ext>
             </a:extLst>
           </p:cNvPr>
@@ -6056,7 +6056,7 @@
           <p:cNvPr id="11" name="">
             <a:extLst xmlns:a="http://schemas.openxmlformats.org/drawingml/2006/main">
               <a:ext uri="{FF2B5EF4-FFF2-40B4-BE49-F238E27FC236}">
-                <a16:creationId xmlns:a16="http://schemas.microsoft.com/office/drawing/2014/main" id="{11419B4B-2DFC-4427-A6B8-50A69B077258}"/>
+                <a16:creationId xmlns:a16="http://schemas.microsoft.com/office/drawing/2014/main" id="{16E44E24-26FD-4D6E-A946-F98ACE8BD697}"/>
               </a:ext>
             </a:extLst>
           </p:cNvPr>
@@ -6088,7 +6088,7 @@
           <p:cNvPr id="12" name="">
             <a:extLst xmlns:a="http://schemas.openxmlformats.org/drawingml/2006/main">
               <a:ext uri="{FF2B5EF4-FFF2-40B4-BE49-F238E27FC236}">
-                <a16:creationId xmlns:a16="http://schemas.microsoft.com/office/drawing/2014/main" id="{0BF0125F-7C68-4398-8015-87745624FC41}"/>
+                <a16:creationId xmlns:a16="http://schemas.microsoft.com/office/drawing/2014/main" id="{395BF09F-68DA-4810-B404-F985D78E6E8F}"/>
               </a:ext>
             </a:extLst>
           </p:cNvPr>
@@ -6145,7 +6145,7 @@
           <p:cNvPr id="13" name="">
             <a:extLst xmlns:a="http://schemas.openxmlformats.org/drawingml/2006/main">
               <a:ext uri="{FF2B5EF4-FFF2-40B4-BE49-F238E27FC236}">
-                <a16:creationId xmlns:a16="http://schemas.microsoft.com/office/drawing/2014/main" id="{9D7DE791-BF7A-4619-B982-86AFD79BC010}"/>
+                <a16:creationId xmlns:a16="http://schemas.microsoft.com/office/drawing/2014/main" id="{C0FB1C6B-46C2-4114-9A6E-E5194C1BB808}"/>
               </a:ext>
             </a:extLst>
           </p:cNvPr>
@@ -6202,7 +6202,7 @@
           <p:cNvPr id="14" name="">
             <a:extLst xmlns:a="http://schemas.openxmlformats.org/drawingml/2006/main">
               <a:ext uri="{FF2B5EF4-FFF2-40B4-BE49-F238E27FC236}">
-                <a16:creationId xmlns:a16="http://schemas.microsoft.com/office/drawing/2014/main" id="{565B5F6C-9888-498D-B50C-799D7C58B5A8}"/>
+                <a16:creationId xmlns:a16="http://schemas.microsoft.com/office/drawing/2014/main" id="{4B107365-6004-4406-91C7-1643013BA288}"/>
               </a:ext>
             </a:extLst>
           </p:cNvPr>
@@ -6236,7 +6236,7 @@
           <p:cNvPr id="15" name="">
             <a:extLst xmlns:a="http://schemas.openxmlformats.org/drawingml/2006/main">
               <a:ext uri="{FF2B5EF4-FFF2-40B4-BE49-F238E27FC236}">
-                <a16:creationId xmlns:a16="http://schemas.microsoft.com/office/drawing/2014/main" id="{60F2FD51-0382-449B-897A-FF05DCE76C3A}"/>
+                <a16:creationId xmlns:a16="http://schemas.microsoft.com/office/drawing/2014/main" id="{73BD6AE4-83AB-4A09-A3EA-322A70049CFC}"/>
               </a:ext>
             </a:extLst>
           </p:cNvPr>
@@ -6268,7 +6268,7 @@
           <p:cNvPr id="16" name="">
             <a:extLst xmlns:a="http://schemas.openxmlformats.org/drawingml/2006/main">
               <a:ext uri="{FF2B5EF4-FFF2-40B4-BE49-F238E27FC236}">
-                <a16:creationId xmlns:a16="http://schemas.microsoft.com/office/drawing/2014/main" id="{F116A3CB-C416-4985-B2FF-BABFA16A1946}"/>
+                <a16:creationId xmlns:a16="http://schemas.microsoft.com/office/drawing/2014/main" id="{2C0D7FF1-FF80-40F3-8517-913289C37065}"/>
               </a:ext>
             </a:extLst>
           </p:cNvPr>
@@ -6325,7 +6325,7 @@
           <p:cNvPr id="17" name="">
             <a:extLst xmlns:a="http://schemas.openxmlformats.org/drawingml/2006/main">
               <a:ext uri="{FF2B5EF4-FFF2-40B4-BE49-F238E27FC236}">
-                <a16:creationId xmlns:a16="http://schemas.microsoft.com/office/drawing/2014/main" id="{0FAB6738-B06E-4ADF-9A2B-720AD220AC42}"/>
+                <a16:creationId xmlns:a16="http://schemas.microsoft.com/office/drawing/2014/main" id="{C44C5F0F-5415-4FDA-A78C-D4C2E0CC20B8}"/>
               </a:ext>
             </a:extLst>
           </p:cNvPr>
@@ -6382,7 +6382,7 @@
           <p:cNvPr id="18" name="">
             <a:extLst xmlns:a="http://schemas.openxmlformats.org/drawingml/2006/main">
               <a:ext uri="{FF2B5EF4-FFF2-40B4-BE49-F238E27FC236}">
-                <a16:creationId xmlns:a16="http://schemas.microsoft.com/office/drawing/2014/main" id="{8AF5CB50-3E87-4ED4-90A2-06DAE4E231D7}"/>
+                <a16:creationId xmlns:a16="http://schemas.microsoft.com/office/drawing/2014/main" id="{46BA947B-E6F2-4675-BBCF-9813D58C8F4E}"/>
               </a:ext>
             </a:extLst>
           </p:cNvPr>
@@ -6416,7 +6416,7 @@
           <p:cNvPr id="19" name="">
             <a:extLst xmlns:a="http://schemas.openxmlformats.org/drawingml/2006/main">
               <a:ext uri="{FF2B5EF4-FFF2-40B4-BE49-F238E27FC236}">
-                <a16:creationId xmlns:a16="http://schemas.microsoft.com/office/drawing/2014/main" id="{ECD1A63B-7858-4B2E-A08E-D227255011D5}"/>
+                <a16:creationId xmlns:a16="http://schemas.microsoft.com/office/drawing/2014/main" id="{88C18B33-8170-4839-A79F-0B22CAD2019F}"/>
               </a:ext>
             </a:extLst>
           </p:cNvPr>
@@ -6448,7 +6448,7 @@
           <p:cNvPr id="20" name="">
             <a:extLst xmlns:a="http://schemas.openxmlformats.org/drawingml/2006/main">
               <a:ext uri="{FF2B5EF4-FFF2-40B4-BE49-F238E27FC236}">
-                <a16:creationId xmlns:a16="http://schemas.microsoft.com/office/drawing/2014/main" id="{FA7644B3-418F-4003-892F-AC4807B91140}"/>
+                <a16:creationId xmlns:a16="http://schemas.microsoft.com/office/drawing/2014/main" id="{8FE301DC-9A99-4F40-A5F8-1D8711FC2AEE}"/>
               </a:ext>
             </a:extLst>
           </p:cNvPr>
@@ -6505,7 +6505,7 @@
           <p:cNvPr id="21" name="">
             <a:extLst xmlns:a="http://schemas.openxmlformats.org/drawingml/2006/main">
               <a:ext uri="{FF2B5EF4-FFF2-40B4-BE49-F238E27FC236}">
-                <a16:creationId xmlns:a16="http://schemas.microsoft.com/office/drawing/2014/main" id="{09D6B9A3-3923-4C74-8A60-215FFB1551EE}"/>
+                <a16:creationId xmlns:a16="http://schemas.microsoft.com/office/drawing/2014/main" id="{AEFB988B-F3D3-4EDA-8A4D-586A185DE662}"/>
               </a:ext>
             </a:extLst>
           </p:cNvPr>
@@ -6562,7 +6562,7 @@
           <p:cNvPr id="22" name="">
             <a:extLst xmlns:a="http://schemas.openxmlformats.org/drawingml/2006/main">
               <a:ext uri="{FF2B5EF4-FFF2-40B4-BE49-F238E27FC236}">
-                <a16:creationId xmlns:a16="http://schemas.microsoft.com/office/drawing/2014/main" id="{B894A931-BEED-4663-AAB0-20392E113B6A}"/>
+                <a16:creationId xmlns:a16="http://schemas.microsoft.com/office/drawing/2014/main" id="{D20C67FA-388F-4652-923F-B99AB9C040CD}"/>
               </a:ext>
             </a:extLst>
           </p:cNvPr>
@@ -6617,7 +6617,7 @@
     </p:spTree>
     <p:extLst>
       <p:ext uri="{BB962C8B-B14F-4D97-AF65-F5344CB8AC3E}">
-        <p14:creationId xmlns:p14="http://schemas.microsoft.com/office/powerpoint/2010/main" val="75134189"/>
+        <p14:creationId xmlns:p14="http://schemas.microsoft.com/office/powerpoint/2010/main" val="1194002217"/>
       </p:ext>
     </p:extLst>
   </p:cSld>
@@ -6818,7 +6818,7 @@
           <p:cNvPr id="16" name="">
             <a:extLst xmlns:a="http://schemas.openxmlformats.org/drawingml/2006/main">
               <a:ext uri="{FF2B5EF4-FFF2-40B4-BE49-F238E27FC236}">
-                <a16:creationId xmlns:a16="http://schemas.microsoft.com/office/drawing/2014/main" id="{6B67CB29-B584-4CEC-A89C-1CD3043A0D1F}"/>
+                <a16:creationId xmlns:a16="http://schemas.microsoft.com/office/drawing/2014/main" id="{08918C27-664C-4E91-9EE7-C8B13DB6B679}"/>
               </a:ext>
             </a:extLst>
           </p:cNvPr>
@@ -6850,7 +6850,7 @@
           <p:cNvPr id="2" name="">
             <a:extLst xmlns:a="http://schemas.openxmlformats.org/drawingml/2006/main">
               <a:ext uri="{FF2B5EF4-FFF2-40B4-BE49-F238E27FC236}">
-                <a16:creationId xmlns:a16="http://schemas.microsoft.com/office/drawing/2014/main" id="{3C34EC55-7DC8-4B34-97CE-D80710A99A31}"/>
+                <a16:creationId xmlns:a16="http://schemas.microsoft.com/office/drawing/2014/main" id="{4B474C27-3061-4824-8863-393F25576701}"/>
               </a:ext>
             </a:extLst>
           </p:cNvPr>
@@ -6907,7 +6907,7 @@
           <p:cNvPr id="3" name="">
             <a:extLst xmlns:a="http://schemas.openxmlformats.org/drawingml/2006/main">
               <a:ext uri="{FF2B5EF4-FFF2-40B4-BE49-F238E27FC236}">
-                <a16:creationId xmlns:a16="http://schemas.microsoft.com/office/drawing/2014/main" id="{9021F336-1BC6-41B9-99E8-8E46A8B136CE}"/>
+                <a16:creationId xmlns:a16="http://schemas.microsoft.com/office/drawing/2014/main" id="{F135B822-B462-46F6-A4C0-1A02060F8BAA}"/>
               </a:ext>
             </a:extLst>
           </p:cNvPr>
@@ -6939,7 +6939,7 @@
           <p:cNvPr id="4" name="">
             <a:extLst xmlns:a="http://schemas.openxmlformats.org/drawingml/2006/main">
               <a:ext uri="{FF2B5EF4-FFF2-40B4-BE49-F238E27FC236}">
-                <a16:creationId xmlns:a16="http://schemas.microsoft.com/office/drawing/2014/main" id="{6C392E14-CCC0-4907-A1BE-1BE9D59B16F7}"/>
+                <a16:creationId xmlns:a16="http://schemas.microsoft.com/office/drawing/2014/main" id="{92ED2EB9-F26A-4C13-AA8C-8D632F551876}"/>
               </a:ext>
             </a:extLst>
           </p:cNvPr>
@@ -6996,7 +6996,7 @@
           <p:cNvPr id="5" name="">
             <a:extLst xmlns:a="http://schemas.openxmlformats.org/drawingml/2006/main">
               <a:ext uri="{FF2B5EF4-FFF2-40B4-BE49-F238E27FC236}">
-                <a16:creationId xmlns:a16="http://schemas.microsoft.com/office/drawing/2014/main" id="{BFD2397B-7D90-4C50-893B-0FFA9C951565}"/>
+                <a16:creationId xmlns:a16="http://schemas.microsoft.com/office/drawing/2014/main" id="{005C54FA-7BE1-419B-A6F4-7E071AF338E9}"/>
               </a:ext>
             </a:extLst>
           </p:cNvPr>
@@ -7053,7 +7053,7 @@
           <p:cNvPr id="6" name="">
             <a:extLst xmlns:a="http://schemas.openxmlformats.org/drawingml/2006/main">
               <a:ext uri="{FF2B5EF4-FFF2-40B4-BE49-F238E27FC236}">
-                <a16:creationId xmlns:a16="http://schemas.microsoft.com/office/drawing/2014/main" id="{F4C07358-B0FC-4043-AA4D-A9E8D8A6BFCE}"/>
+                <a16:creationId xmlns:a16="http://schemas.microsoft.com/office/drawing/2014/main" id="{3646FA86-3D94-4004-94B8-52995DEB8B9E}"/>
               </a:ext>
             </a:extLst>
           </p:cNvPr>
@@ -7110,7 +7110,7 @@
           <p:cNvPr id="7" name="">
             <a:extLst xmlns:a="http://schemas.openxmlformats.org/drawingml/2006/main">
               <a:ext uri="{FF2B5EF4-FFF2-40B4-BE49-F238E27FC236}">
-                <a16:creationId xmlns:a16="http://schemas.microsoft.com/office/drawing/2014/main" id="{09A1A0BB-338A-4D84-8F96-E99D30FA6B47}"/>
+                <a16:creationId xmlns:a16="http://schemas.microsoft.com/office/drawing/2014/main" id="{312876E7-56D5-4C12-B577-B4D334C11C9B}"/>
               </a:ext>
             </a:extLst>
           </p:cNvPr>
@@ -7142,7 +7142,7 @@
           <p:cNvPr id="8" name="">
             <a:extLst xmlns:a="http://schemas.openxmlformats.org/drawingml/2006/main">
               <a:ext uri="{FF2B5EF4-FFF2-40B4-BE49-F238E27FC236}">
-                <a16:creationId xmlns:a16="http://schemas.microsoft.com/office/drawing/2014/main" id="{AEFF24EE-50DE-4ECA-BC23-668AA68111EB}"/>
+                <a16:creationId xmlns:a16="http://schemas.microsoft.com/office/drawing/2014/main" id="{13A1EFE3-834B-4B0D-89B6-E2AAD2045C34}"/>
               </a:ext>
             </a:extLst>
           </p:cNvPr>
@@ -7199,7 +7199,7 @@
           <p:cNvPr id="9" name="">
             <a:extLst xmlns:a="http://schemas.openxmlformats.org/drawingml/2006/main">
               <a:ext uri="{FF2B5EF4-FFF2-40B4-BE49-F238E27FC236}">
-                <a16:creationId xmlns:a16="http://schemas.microsoft.com/office/drawing/2014/main" id="{E90E79F9-9B32-4893-913B-C141FF816220}"/>
+                <a16:creationId xmlns:a16="http://schemas.microsoft.com/office/drawing/2014/main" id="{B174F975-BB6D-4E55-8C5D-22C81FF34726}"/>
               </a:ext>
             </a:extLst>
           </p:cNvPr>
@@ -7256,7 +7256,7 @@
           <p:cNvPr id="10" name="">
             <a:extLst xmlns:a="http://schemas.openxmlformats.org/drawingml/2006/main">
               <a:ext uri="{FF2B5EF4-FFF2-40B4-BE49-F238E27FC236}">
-                <a16:creationId xmlns:a16="http://schemas.microsoft.com/office/drawing/2014/main" id="{226DCF77-5748-481C-8F6F-269458032C2C}"/>
+                <a16:creationId xmlns:a16="http://schemas.microsoft.com/office/drawing/2014/main" id="{EE1F68FB-285D-4F8E-8BC5-5F37D5A4016C}"/>
               </a:ext>
             </a:extLst>
           </p:cNvPr>
@@ -7313,7 +7313,7 @@
           <p:cNvPr id="11" name="">
             <a:extLst xmlns:a="http://schemas.openxmlformats.org/drawingml/2006/main">
               <a:ext uri="{FF2B5EF4-FFF2-40B4-BE49-F238E27FC236}">
-                <a16:creationId xmlns:a16="http://schemas.microsoft.com/office/drawing/2014/main" id="{4670FD07-3366-4A52-B0C1-85D8E24310A4}"/>
+                <a16:creationId xmlns:a16="http://schemas.microsoft.com/office/drawing/2014/main" id="{5ED05577-6915-4054-8691-2CB92FBF1420}"/>
               </a:ext>
             </a:extLst>
           </p:cNvPr>
@@ -7345,7 +7345,7 @@
           <p:cNvPr id="12" name="">
             <a:extLst xmlns:a="http://schemas.openxmlformats.org/drawingml/2006/main">
               <a:ext uri="{FF2B5EF4-FFF2-40B4-BE49-F238E27FC236}">
-                <a16:creationId xmlns:a16="http://schemas.microsoft.com/office/drawing/2014/main" id="{C58FD892-06DD-4646-8CAE-F945FF0EDD70}"/>
+                <a16:creationId xmlns:a16="http://schemas.microsoft.com/office/drawing/2014/main" id="{BE235D7C-EE88-4353-BE8D-101FAF7C0E0C}"/>
               </a:ext>
             </a:extLst>
           </p:cNvPr>
@@ -7402,7 +7402,7 @@
           <p:cNvPr id="13" name="">
             <a:extLst xmlns:a="http://schemas.openxmlformats.org/drawingml/2006/main">
               <a:ext uri="{FF2B5EF4-FFF2-40B4-BE49-F238E27FC236}">
-                <a16:creationId xmlns:a16="http://schemas.microsoft.com/office/drawing/2014/main" id="{006AC080-DA40-49E3-919E-B0F7D26C4E39}"/>
+                <a16:creationId xmlns:a16="http://schemas.microsoft.com/office/drawing/2014/main" id="{B3EBE223-A1AE-425C-AAB5-14A015946AE4}"/>
               </a:ext>
             </a:extLst>
           </p:cNvPr>
@@ -7459,7 +7459,7 @@
           <p:cNvPr id="14" name="">
             <a:extLst xmlns:a="http://schemas.openxmlformats.org/drawingml/2006/main">
               <a:ext uri="{FF2B5EF4-FFF2-40B4-BE49-F238E27FC236}">
-                <a16:creationId xmlns:a16="http://schemas.microsoft.com/office/drawing/2014/main" id="{53CC8D42-3039-4831-BDD7-636A343BDC93}"/>
+                <a16:creationId xmlns:a16="http://schemas.microsoft.com/office/drawing/2014/main" id="{0F3D5C33-F58E-4F9E-A619-C2473DC7A0DE}"/>
               </a:ext>
             </a:extLst>
           </p:cNvPr>
@@ -7516,7 +7516,7 @@
           <p:cNvPr id="15" name="">
             <a:extLst xmlns:a="http://schemas.openxmlformats.org/drawingml/2006/main">
               <a:ext uri="{FF2B5EF4-FFF2-40B4-BE49-F238E27FC236}">
-                <a16:creationId xmlns:a16="http://schemas.microsoft.com/office/drawing/2014/main" id="{B3465868-6F32-4E53-9FF1-E463BE87E913}"/>
+                <a16:creationId xmlns:a16="http://schemas.microsoft.com/office/drawing/2014/main" id="{368B9781-80A7-4D9B-BFCC-C017644307FB}"/>
               </a:ext>
             </a:extLst>
           </p:cNvPr>
@@ -7571,7 +7571,7 @@
     </p:spTree>
     <p:extLst>
       <p:ext uri="{BB962C8B-B14F-4D97-AF65-F5344CB8AC3E}">
-        <p14:creationId xmlns:p14="http://schemas.microsoft.com/office/powerpoint/2010/main" val="187392633"/>
+        <p14:creationId xmlns:p14="http://schemas.microsoft.com/office/powerpoint/2010/main" val="1107813808"/>
       </p:ext>
     </p:extLst>
   </p:cSld>
@@ -7772,7 +7772,7 @@
           <p:cNvPr id="23" name="">
             <a:extLst xmlns:a="http://schemas.openxmlformats.org/drawingml/2006/main">
               <a:ext uri="{FF2B5EF4-FFF2-40B4-BE49-F238E27FC236}">
-                <a16:creationId xmlns:a16="http://schemas.microsoft.com/office/drawing/2014/main" id="{50CB0866-9299-46B2-A7AE-149EE68A5780}"/>
+                <a16:creationId xmlns:a16="http://schemas.microsoft.com/office/drawing/2014/main" id="{02483285-0988-470A-8E5F-0ED65CDF4296}"/>
               </a:ext>
             </a:extLst>
           </p:cNvPr>
@@ -7804,7 +7804,7 @@
           <p:cNvPr id="2" name="">
             <a:extLst xmlns:a="http://schemas.openxmlformats.org/drawingml/2006/main">
               <a:ext uri="{FF2B5EF4-FFF2-40B4-BE49-F238E27FC236}">
-                <a16:creationId xmlns:a16="http://schemas.microsoft.com/office/drawing/2014/main" id="{7D81FF43-A0AE-483C-91A6-73BBADBF968F}"/>
+                <a16:creationId xmlns:a16="http://schemas.microsoft.com/office/drawing/2014/main" id="{AF5AB46A-5622-4116-B64A-EED4F6A14B26}"/>
               </a:ext>
             </a:extLst>
           </p:cNvPr>
@@ -7861,7 +7861,7 @@
           <p:cNvPr id="3" name="">
             <a:extLst xmlns:a="http://schemas.openxmlformats.org/drawingml/2006/main">
               <a:ext uri="{FF2B5EF4-FFF2-40B4-BE49-F238E27FC236}">
-                <a16:creationId xmlns:a16="http://schemas.microsoft.com/office/drawing/2014/main" id="{97EB832F-658B-4EBB-8368-3195A9C27597}"/>
+                <a16:creationId xmlns:a16="http://schemas.microsoft.com/office/drawing/2014/main" id="{2FB3EC79-A9C9-43CC-8AC3-67196ABF632D}"/>
               </a:ext>
             </a:extLst>
           </p:cNvPr>
@@ -7893,7 +7893,7 @@
           <p:cNvPr id="4" name="">
             <a:extLst xmlns:a="http://schemas.openxmlformats.org/drawingml/2006/main">
               <a:ext uri="{FF2B5EF4-FFF2-40B4-BE49-F238E27FC236}">
-                <a16:creationId xmlns:a16="http://schemas.microsoft.com/office/drawing/2014/main" id="{EE9D9748-86DA-42BE-81F5-46FBB16AC3C5}"/>
+                <a16:creationId xmlns:a16="http://schemas.microsoft.com/office/drawing/2014/main" id="{EBBBF970-800E-419C-B96C-D4FE4DDECC47}"/>
               </a:ext>
             </a:extLst>
           </p:cNvPr>
@@ -7950,7 +7950,7 @@
           <p:cNvPr id="5" name="">
             <a:extLst xmlns:a="http://schemas.openxmlformats.org/drawingml/2006/main">
               <a:ext uri="{FF2B5EF4-FFF2-40B4-BE49-F238E27FC236}">
-                <a16:creationId xmlns:a16="http://schemas.microsoft.com/office/drawing/2014/main" id="{30FF33BB-5971-4BC6-95F0-03D9CE5AA7B0}"/>
+                <a16:creationId xmlns:a16="http://schemas.microsoft.com/office/drawing/2014/main" id="{DB8702C2-4479-4D85-8FE5-C7BC28356799}"/>
               </a:ext>
             </a:extLst>
           </p:cNvPr>
@@ -8007,7 +8007,7 @@
           <p:cNvPr id="6" name="">
             <a:extLst xmlns:a="http://schemas.openxmlformats.org/drawingml/2006/main">
               <a:ext uri="{FF2B5EF4-FFF2-40B4-BE49-F238E27FC236}">
-                <a16:creationId xmlns:a16="http://schemas.microsoft.com/office/drawing/2014/main" id="{4082A5C6-FE4D-42C3-9DA9-A81AA08BEE03}"/>
+                <a16:creationId xmlns:a16="http://schemas.microsoft.com/office/drawing/2014/main" id="{B59D357A-A510-4B4A-8A10-F4C4929874BF}"/>
               </a:ext>
             </a:extLst>
           </p:cNvPr>
@@ -8064,7 +8064,7 @@
           <p:cNvPr id="7" name="">
             <a:extLst xmlns:a="http://schemas.openxmlformats.org/drawingml/2006/main">
               <a:ext uri="{FF2B5EF4-FFF2-40B4-BE49-F238E27FC236}">
-                <a16:creationId xmlns:a16="http://schemas.microsoft.com/office/drawing/2014/main" id="{CF1333B0-F3B9-4668-98A3-943421D1964C}"/>
+                <a16:creationId xmlns:a16="http://schemas.microsoft.com/office/drawing/2014/main" id="{41502ACD-5F6B-4610-B74B-F1CC04ACC802}"/>
               </a:ext>
             </a:extLst>
           </p:cNvPr>
@@ -8096,7 +8096,7 @@
           <p:cNvPr id="8" name="">
             <a:extLst xmlns:a="http://schemas.openxmlformats.org/drawingml/2006/main">
               <a:ext uri="{FF2B5EF4-FFF2-40B4-BE49-F238E27FC236}">
-                <a16:creationId xmlns:a16="http://schemas.microsoft.com/office/drawing/2014/main" id="{590C0D09-2C41-4287-AF57-99068DB27798}"/>
+                <a16:creationId xmlns:a16="http://schemas.microsoft.com/office/drawing/2014/main" id="{DAED0DBB-6F63-4F40-90FB-9F92C4578416}"/>
               </a:ext>
             </a:extLst>
           </p:cNvPr>
@@ -8153,7 +8153,7 @@
           <p:cNvPr id="9" name="">
             <a:extLst xmlns:a="http://schemas.openxmlformats.org/drawingml/2006/main">
               <a:ext uri="{FF2B5EF4-FFF2-40B4-BE49-F238E27FC236}">
-                <a16:creationId xmlns:a16="http://schemas.microsoft.com/office/drawing/2014/main" id="{AD51E32A-00B7-459E-9F02-9318B4CB4B7C}"/>
+                <a16:creationId xmlns:a16="http://schemas.microsoft.com/office/drawing/2014/main" id="{B1BED230-9CBE-4F6F-8453-9E6E13AAD552}"/>
               </a:ext>
             </a:extLst>
           </p:cNvPr>
@@ -8210,19 +8210,19 @@
           <p:cNvPr id="10" name="">
             <a:extLst xmlns:a="http://schemas.openxmlformats.org/drawingml/2006/main">
               <a:ext uri="{FF2B5EF4-FFF2-40B4-BE49-F238E27FC236}">
-                <a16:creationId xmlns:a16="http://schemas.microsoft.com/office/drawing/2014/main" id="{970921D8-8F1D-495D-8474-56BCF542A31C}"/>
-              </a:ext>
-            </a:extLst>
-          </p:cNvPr>
-          <p:cNvSpPr>
-            <a:spLocks xmlns:a="http://schemas.openxmlformats.org/drawingml/2006/main" noGrp="1"/>
-          </p:cNvSpPr>
-          <p:nvPr/>
-        </p:nvSpPr>
-        <p:spPr>
-          <a:xfrm xmlns:a="http://schemas.openxmlformats.org/drawingml/2006/main">
-            <a:off x="914400" y="1257300"/>
-            <a:ext cx="10363200" cy="781050"/>
+                <a16:creationId xmlns:a16="http://schemas.microsoft.com/office/drawing/2014/main" id="{285C7E02-EF46-466E-A16C-69ABEF17D0D7}"/>
+              </a:ext>
+            </a:extLst>
+          </p:cNvPr>
+          <p:cNvSpPr>
+            <a:spLocks xmlns:a="http://schemas.openxmlformats.org/drawingml/2006/main" noGrp="1"/>
+          </p:cNvSpPr>
+          <p:nvPr/>
+        </p:nvSpPr>
+        <p:spPr>
+          <a:xfrm xmlns:a="http://schemas.openxmlformats.org/drawingml/2006/main">
+            <a:off x="857250" y="1219200"/>
+            <a:ext cx="10477500" cy="742950"/>
           </a:xfrm>
           <a:prstGeom xmlns:a="http://schemas.openxmlformats.org/drawingml/2006/main" prst="rect">
             <a:avLst/>
@@ -8239,7 +8239,7 @@
           <a:lstStyle xmlns:a="http://schemas.openxmlformats.org/drawingml/2006/main"/>
           <a:p xmlns:a="http://schemas.openxmlformats.org/drawingml/2006/main">
             <a:pPr algn="ctr">
-              <a:defRPr sz="2175" b="1">
+              <a:defRPr sz="2100" b="1">
                 <a:solidFill>
                   <a:srgbClr val="17253A"/>
                 </a:solidFill>
@@ -8249,7 +8249,7 @@
               </a:defRPr>
             </a:pPr>
             <a:r>
-              <a:rPr sz="2175" b="1">
+              <a:rPr sz="2100" b="1">
                 <a:solidFill>
                   <a:srgbClr val="17253A"/>
                 </a:solidFill>
@@ -8267,28 +8267,30 @@
           <p:cNvPr id="11" name="">
             <a:extLst xmlns:a="http://schemas.openxmlformats.org/drawingml/2006/main">
               <a:ext uri="{FF2B5EF4-FFF2-40B4-BE49-F238E27FC236}">
-                <a16:creationId xmlns:a16="http://schemas.microsoft.com/office/drawing/2014/main" id="{63D748C4-604D-4A20-AC6A-EEB5579F7A13}"/>
-              </a:ext>
-            </a:extLst>
-          </p:cNvPr>
-          <p:cNvSpPr>
-            <a:spLocks xmlns:a="http://schemas.openxmlformats.org/drawingml/2006/main" noGrp="1"/>
-          </p:cNvSpPr>
-          <p:nvPr/>
-        </p:nvSpPr>
-        <p:spPr>
-          <a:xfrm xmlns:a="http://schemas.openxmlformats.org/drawingml/2006/main">
-            <a:off x="1000125" y="2247900"/>
-            <a:ext cx="476250" cy="476250"/>
-          </a:xfrm>
-          <a:prstGeom xmlns:a="http://schemas.openxmlformats.org/drawingml/2006/main" prst="ellipse">
+                <a16:creationId xmlns:a16="http://schemas.microsoft.com/office/drawing/2014/main" id="{9D730463-96C7-430F-8D56-12889C761121}"/>
+              </a:ext>
+            </a:extLst>
+          </p:cNvPr>
+          <p:cNvSpPr>
+            <a:spLocks xmlns:a="http://schemas.openxmlformats.org/drawingml/2006/main" noGrp="1"/>
+          </p:cNvSpPr>
+          <p:nvPr/>
+        </p:nvSpPr>
+        <p:spPr>
+          <a:xfrm xmlns:a="http://schemas.openxmlformats.org/drawingml/2006/main">
+            <a:off x="971550" y="2124075"/>
+            <a:ext cx="38100" cy="3524250"/>
+          </a:xfrm>
+          <a:prstGeom xmlns:a="http://schemas.openxmlformats.org/drawingml/2006/main" prst="rect">
             <a:avLst/>
           </a:prstGeom>
           <a:solidFill xmlns:a="http://schemas.openxmlformats.org/drawingml/2006/main">
-            <a:srgbClr val="18324A"/>
+            <a:srgbClr val="2C6E73"/>
           </a:solidFill>
           <a:ln xmlns:a="http://schemas.openxmlformats.org/drawingml/2006/main" w="0">
-            <a:noFill/>
+            <a:solidFill>
+              <a:srgbClr val="2C6E73"/>
+            </a:solidFill>
           </a:ln>
         </p:spPr>
       </p:sp>
@@ -8297,19 +8299,19 @@
           <p:cNvPr id="12" name="">
             <a:extLst xmlns:a="http://schemas.openxmlformats.org/drawingml/2006/main">
               <a:ext uri="{FF2B5EF4-FFF2-40B4-BE49-F238E27FC236}">
-                <a16:creationId xmlns:a16="http://schemas.microsoft.com/office/drawing/2014/main" id="{6332112B-77EE-46A7-972C-4BB78C7243B7}"/>
-              </a:ext>
-            </a:extLst>
-          </p:cNvPr>
-          <p:cNvSpPr>
-            <a:spLocks xmlns:a="http://schemas.openxmlformats.org/drawingml/2006/main" noGrp="1"/>
-          </p:cNvSpPr>
-          <p:nvPr/>
-        </p:nvSpPr>
-        <p:spPr>
-          <a:xfrm xmlns:a="http://schemas.openxmlformats.org/drawingml/2006/main">
-            <a:off x="1000125" y="2276475"/>
-            <a:ext cx="476250" cy="419100"/>
+                <a16:creationId xmlns:a16="http://schemas.microsoft.com/office/drawing/2014/main" id="{0BF77416-7BEA-4DFF-BABB-D064CDCBA7CA}"/>
+              </a:ext>
+            </a:extLst>
+          </p:cNvPr>
+          <p:cNvSpPr>
+            <a:spLocks xmlns:a="http://schemas.openxmlformats.org/drawingml/2006/main" noGrp="1"/>
+          </p:cNvSpPr>
+          <p:nvPr/>
+        </p:nvSpPr>
+        <p:spPr>
+          <a:xfrm xmlns:a="http://schemas.openxmlformats.org/drawingml/2006/main">
+            <a:off x="1162050" y="2200275"/>
+            <a:ext cx="400050" cy="400050"/>
           </a:xfrm>
           <a:prstGeom xmlns:a="http://schemas.openxmlformats.org/drawingml/2006/main" prst="rect">
             <a:avLst/>
@@ -8326,9 +8328,9 @@
           <a:lstStyle xmlns:a="http://schemas.openxmlformats.org/drawingml/2006/main"/>
           <a:p xmlns:a="http://schemas.openxmlformats.org/drawingml/2006/main">
             <a:pPr algn="ctr">
-              <a:defRPr sz="1350" b="1">
-                <a:solidFill>
-                  <a:srgbClr val="FFFFFF"/>
+              <a:defRPr sz="1125" b="1">
+                <a:solidFill>
+                  <a:srgbClr val="2C6E73"/>
                 </a:solidFill>
                 <a:latin typeface="Arial"/>
                 <a:ea typeface="Arial"/>
@@ -8336,9 +8338,9 @@
               </a:defRPr>
             </a:pPr>
             <a:r>
-              <a:rPr sz="1350" b="1">
-                <a:solidFill>
-                  <a:srgbClr val="FFFFFF"/>
+              <a:rPr sz="1125" b="1">
+                <a:solidFill>
+                  <a:srgbClr val="2C6E73"/>
                 </a:solidFill>
                 <a:latin typeface="Arial"/>
                 <a:ea typeface="Arial"/>
@@ -8354,19 +8356,19 @@
           <p:cNvPr id="13" name="">
             <a:extLst xmlns:a="http://schemas.openxmlformats.org/drawingml/2006/main">
               <a:ext uri="{FF2B5EF4-FFF2-40B4-BE49-F238E27FC236}">
-                <a16:creationId xmlns:a16="http://schemas.microsoft.com/office/drawing/2014/main" id="{3C30C607-C6A9-4ED7-9E14-D0850106AFC7}"/>
-              </a:ext>
-            </a:extLst>
-          </p:cNvPr>
-          <p:cNvSpPr>
-            <a:spLocks xmlns:a="http://schemas.openxmlformats.org/drawingml/2006/main" noGrp="1"/>
-          </p:cNvSpPr>
-          <p:nvPr/>
-        </p:nvSpPr>
-        <p:spPr>
-          <a:xfrm xmlns:a="http://schemas.openxmlformats.org/drawingml/2006/main">
-            <a:off x="1714500" y="2181225"/>
-            <a:ext cx="9429750" cy="609600"/>
+                <a16:creationId xmlns:a16="http://schemas.microsoft.com/office/drawing/2014/main" id="{34AA0ECF-CB9F-4CB7-9582-30B7196F4926}"/>
+              </a:ext>
+            </a:extLst>
+          </p:cNvPr>
+          <p:cNvSpPr>
+            <a:spLocks xmlns:a="http://schemas.openxmlformats.org/drawingml/2006/main" noGrp="1"/>
+          </p:cNvSpPr>
+          <p:nvPr/>
+        </p:nvSpPr>
+        <p:spPr>
+          <a:xfrm xmlns:a="http://schemas.openxmlformats.org/drawingml/2006/main">
+            <a:off x="1714500" y="2114550"/>
+            <a:ext cx="9525000" cy="809625"/>
           </a:xfrm>
           <a:prstGeom xmlns:a="http://schemas.openxmlformats.org/drawingml/2006/main" prst="rect">
             <a:avLst/>
@@ -8383,7 +8385,7 @@
           <a:lstStyle xmlns:a="http://schemas.openxmlformats.org/drawingml/2006/main"/>
           <a:p xmlns:a="http://schemas.openxmlformats.org/drawingml/2006/main">
             <a:pPr algn="l">
-              <a:defRPr sz="1500" b="0">
+              <a:defRPr sz="1725" b="0">
                 <a:solidFill>
                   <a:srgbClr val="17253A"/>
                 </a:solidFill>
@@ -8393,7 +8395,7 @@
               </a:defRPr>
             </a:pPr>
             <a:r>
-              <a:rPr sz="1500" b="0">
+              <a:rPr sz="1725" b="0">
                 <a:solidFill>
                   <a:srgbClr val="17253A"/>
                 </a:solidFill>
@@ -8401,7 +8403,7 @@
                 <a:ea typeface="Arial"/>
                 <a:cs typeface="Arial"/>
               </a:rPr>
-              <a:t>Identify the structure: Underline the place named in the question.</a:t>
+              <a:t>468,753 to nearest 10: ones digit 3</a:t>
             </a:r>
           </a:p>
         </p:txBody>
@@ -8411,28 +8413,30 @@
           <p:cNvPr id="14" name="">
             <a:extLst xmlns:a="http://schemas.openxmlformats.org/drawingml/2006/main">
               <a:ext uri="{FF2B5EF4-FFF2-40B4-BE49-F238E27FC236}">
-                <a16:creationId xmlns:a16="http://schemas.microsoft.com/office/drawing/2014/main" id="{AED72180-155D-4006-BD32-292B262639F9}"/>
-              </a:ext>
-            </a:extLst>
-          </p:cNvPr>
-          <p:cNvSpPr>
-            <a:spLocks xmlns:a="http://schemas.openxmlformats.org/drawingml/2006/main" noGrp="1"/>
-          </p:cNvSpPr>
-          <p:nvPr/>
-        </p:nvSpPr>
-        <p:spPr>
-          <a:xfrm xmlns:a="http://schemas.openxmlformats.org/drawingml/2006/main">
-            <a:off x="1000125" y="2990850"/>
-            <a:ext cx="476250" cy="476250"/>
-          </a:xfrm>
-          <a:prstGeom xmlns:a="http://schemas.openxmlformats.org/drawingml/2006/main" prst="ellipse">
+                <a16:creationId xmlns:a16="http://schemas.microsoft.com/office/drawing/2014/main" id="{D83B4937-D4E6-4F04-8B9B-C0DE708ECE02}"/>
+              </a:ext>
+            </a:extLst>
+          </p:cNvPr>
+          <p:cNvSpPr>
+            <a:spLocks xmlns:a="http://schemas.openxmlformats.org/drawingml/2006/main" noGrp="1"/>
+          </p:cNvSpPr>
+          <p:nvPr/>
+        </p:nvSpPr>
+        <p:spPr>
+          <a:xfrm xmlns:a="http://schemas.openxmlformats.org/drawingml/2006/main">
+            <a:off x="1714500" y="2943225"/>
+            <a:ext cx="9334500" cy="9525"/>
+          </a:xfrm>
+          <a:prstGeom xmlns:a="http://schemas.openxmlformats.org/drawingml/2006/main" prst="rect">
             <a:avLst/>
           </a:prstGeom>
           <a:solidFill xmlns:a="http://schemas.openxmlformats.org/drawingml/2006/main">
-            <a:srgbClr val="2C6E73"/>
+            <a:srgbClr val="D9E0E6"/>
           </a:solidFill>
           <a:ln xmlns:a="http://schemas.openxmlformats.org/drawingml/2006/main" w="0">
-            <a:noFill/>
+            <a:solidFill>
+              <a:srgbClr val="D9E0E6"/>
+            </a:solidFill>
           </a:ln>
         </p:spPr>
       </p:sp>
@@ -8441,19 +8445,19 @@
           <p:cNvPr id="15" name="">
             <a:extLst xmlns:a="http://schemas.openxmlformats.org/drawingml/2006/main">
               <a:ext uri="{FF2B5EF4-FFF2-40B4-BE49-F238E27FC236}">
-                <a16:creationId xmlns:a16="http://schemas.microsoft.com/office/drawing/2014/main" id="{19579033-D0E2-4D42-8F1F-A5EE5C9C2229}"/>
-              </a:ext>
-            </a:extLst>
-          </p:cNvPr>
-          <p:cNvSpPr>
-            <a:spLocks xmlns:a="http://schemas.openxmlformats.org/drawingml/2006/main" noGrp="1"/>
-          </p:cNvSpPr>
-          <p:nvPr/>
-        </p:nvSpPr>
-        <p:spPr>
-          <a:xfrm xmlns:a="http://schemas.openxmlformats.org/drawingml/2006/main">
-            <a:off x="1000125" y="3019425"/>
-            <a:ext cx="476250" cy="419100"/>
+                <a16:creationId xmlns:a16="http://schemas.microsoft.com/office/drawing/2014/main" id="{D95CBA48-CFEB-432F-8893-5C9D2F52C054}"/>
+              </a:ext>
+            </a:extLst>
+          </p:cNvPr>
+          <p:cNvSpPr>
+            <a:spLocks xmlns:a="http://schemas.openxmlformats.org/drawingml/2006/main" noGrp="1"/>
+          </p:cNvSpPr>
+          <p:nvPr/>
+        </p:nvSpPr>
+        <p:spPr>
+          <a:xfrm xmlns:a="http://schemas.openxmlformats.org/drawingml/2006/main">
+            <a:off x="1162050" y="3076575"/>
+            <a:ext cx="400050" cy="400050"/>
           </a:xfrm>
           <a:prstGeom xmlns:a="http://schemas.openxmlformats.org/drawingml/2006/main" prst="rect">
             <a:avLst/>
@@ -8470,9 +8474,9 @@
           <a:lstStyle xmlns:a="http://schemas.openxmlformats.org/drawingml/2006/main"/>
           <a:p xmlns:a="http://schemas.openxmlformats.org/drawingml/2006/main">
             <a:pPr algn="ctr">
-              <a:defRPr sz="1350" b="1">
-                <a:solidFill>
-                  <a:srgbClr val="FFFFFF"/>
+              <a:defRPr sz="1125" b="1">
+                <a:solidFill>
+                  <a:srgbClr val="2C6E73"/>
                 </a:solidFill>
                 <a:latin typeface="Arial"/>
                 <a:ea typeface="Arial"/>
@@ -8480,9 +8484,9 @@
               </a:defRPr>
             </a:pPr>
             <a:r>
-              <a:rPr sz="1350" b="1">
-                <a:solidFill>
-                  <a:srgbClr val="FFFFFF"/>
+              <a:rPr sz="1125" b="1">
+                <a:solidFill>
+                  <a:srgbClr val="2C6E73"/>
                 </a:solidFill>
                 <a:latin typeface="Arial"/>
                 <a:ea typeface="Arial"/>
@@ -8498,19 +8502,19 @@
           <p:cNvPr id="16" name="">
             <a:extLst xmlns:a="http://schemas.openxmlformats.org/drawingml/2006/main">
               <a:ext uri="{FF2B5EF4-FFF2-40B4-BE49-F238E27FC236}">
-                <a16:creationId xmlns:a16="http://schemas.microsoft.com/office/drawing/2014/main" id="{05131522-9F1D-4846-AEA2-A4D8F98300AE}"/>
-              </a:ext>
-            </a:extLst>
-          </p:cNvPr>
-          <p:cNvSpPr>
-            <a:spLocks xmlns:a="http://schemas.openxmlformats.org/drawingml/2006/main" noGrp="1"/>
-          </p:cNvSpPr>
-          <p:nvPr/>
-        </p:nvSpPr>
-        <p:spPr>
-          <a:xfrm xmlns:a="http://schemas.openxmlformats.org/drawingml/2006/main">
-            <a:off x="1714500" y="2924175"/>
-            <a:ext cx="9429750" cy="609600"/>
+                <a16:creationId xmlns:a16="http://schemas.microsoft.com/office/drawing/2014/main" id="{6C950D0C-913D-443D-8C15-DE50B3283E7A}"/>
+              </a:ext>
+            </a:extLst>
+          </p:cNvPr>
+          <p:cNvSpPr>
+            <a:spLocks xmlns:a="http://schemas.openxmlformats.org/drawingml/2006/main" noGrp="1"/>
+          </p:cNvSpPr>
+          <p:nvPr/>
+        </p:nvSpPr>
+        <p:spPr>
+          <a:xfrm xmlns:a="http://schemas.openxmlformats.org/drawingml/2006/main">
+            <a:off x="1714500" y="2990850"/>
+            <a:ext cx="9525000" cy="809625"/>
           </a:xfrm>
           <a:prstGeom xmlns:a="http://schemas.openxmlformats.org/drawingml/2006/main" prst="rect">
             <a:avLst/>
@@ -8527,7 +8531,7 @@
           <a:lstStyle xmlns:a="http://schemas.openxmlformats.org/drawingml/2006/main"/>
           <a:p xmlns:a="http://schemas.openxmlformats.org/drawingml/2006/main">
             <a:pPr algn="l">
-              <a:defRPr sz="1500" b="0">
+              <a:defRPr sz="1725" b="0">
                 <a:solidFill>
                   <a:srgbClr val="17253A"/>
                 </a:solidFill>
@@ -8537,7 +8541,7 @@
               </a:defRPr>
             </a:pPr>
             <a:r>
-              <a:rPr sz="1500" b="0">
+              <a:rPr sz="1725" b="0">
                 <a:solidFill>
                   <a:srgbClr val="17253A"/>
                 </a:solidFill>
@@ -8545,7 +8549,7 @@
                 <a:ea typeface="Arial"/>
                 <a:cs typeface="Arial"/>
               </a:rPr>
-              <a:t>Set up the method: Check the digit immediately to its right or locate the two boundaries.</a:t>
+              <a:t>468,753 → 468,750</a:t>
             </a:r>
           </a:p>
         </p:txBody>
@@ -8555,28 +8559,30 @@
           <p:cNvPr id="17" name="">
             <a:extLst xmlns:a="http://schemas.openxmlformats.org/drawingml/2006/main">
               <a:ext uri="{FF2B5EF4-FFF2-40B4-BE49-F238E27FC236}">
-                <a16:creationId xmlns:a16="http://schemas.microsoft.com/office/drawing/2014/main" id="{D4D00AB6-29D2-4411-AC85-8B41BA4813CB}"/>
-              </a:ext>
-            </a:extLst>
-          </p:cNvPr>
-          <p:cNvSpPr>
-            <a:spLocks xmlns:a="http://schemas.openxmlformats.org/drawingml/2006/main" noGrp="1"/>
-          </p:cNvSpPr>
-          <p:nvPr/>
-        </p:nvSpPr>
-        <p:spPr>
-          <a:xfrm xmlns:a="http://schemas.openxmlformats.org/drawingml/2006/main">
-            <a:off x="1000125" y="3733800"/>
-            <a:ext cx="476250" cy="476250"/>
-          </a:xfrm>
-          <a:prstGeom xmlns:a="http://schemas.openxmlformats.org/drawingml/2006/main" prst="ellipse">
+                <a16:creationId xmlns:a16="http://schemas.microsoft.com/office/drawing/2014/main" id="{3DE43868-0BA8-483F-A3B3-3C77535405ED}"/>
+              </a:ext>
+            </a:extLst>
+          </p:cNvPr>
+          <p:cNvSpPr>
+            <a:spLocks xmlns:a="http://schemas.openxmlformats.org/drawingml/2006/main" noGrp="1"/>
+          </p:cNvSpPr>
+          <p:nvPr/>
+        </p:nvSpPr>
+        <p:spPr>
+          <a:xfrm xmlns:a="http://schemas.openxmlformats.org/drawingml/2006/main">
+            <a:off x="1714500" y="3819525"/>
+            <a:ext cx="9334500" cy="9525"/>
+          </a:xfrm>
+          <a:prstGeom xmlns:a="http://schemas.openxmlformats.org/drawingml/2006/main" prst="rect">
             <a:avLst/>
           </a:prstGeom>
           <a:solidFill xmlns:a="http://schemas.openxmlformats.org/drawingml/2006/main">
-            <a:srgbClr val="2C6E73"/>
+            <a:srgbClr val="D9E0E6"/>
           </a:solidFill>
           <a:ln xmlns:a="http://schemas.openxmlformats.org/drawingml/2006/main" w="0">
-            <a:noFill/>
+            <a:solidFill>
+              <a:srgbClr val="D9E0E6"/>
+            </a:solidFill>
           </a:ln>
         </p:spPr>
       </p:sp>
@@ -8585,19 +8591,19 @@
           <p:cNvPr id="18" name="">
             <a:extLst xmlns:a="http://schemas.openxmlformats.org/drawingml/2006/main">
               <a:ext uri="{FF2B5EF4-FFF2-40B4-BE49-F238E27FC236}">
-                <a16:creationId xmlns:a16="http://schemas.microsoft.com/office/drawing/2014/main" id="{B5660AF1-4AFE-4C0A-897B-C1B0A89A6700}"/>
-              </a:ext>
-            </a:extLst>
-          </p:cNvPr>
-          <p:cNvSpPr>
-            <a:spLocks xmlns:a="http://schemas.openxmlformats.org/drawingml/2006/main" noGrp="1"/>
-          </p:cNvSpPr>
-          <p:nvPr/>
-        </p:nvSpPr>
-        <p:spPr>
-          <a:xfrm xmlns:a="http://schemas.openxmlformats.org/drawingml/2006/main">
-            <a:off x="1000125" y="3762375"/>
-            <a:ext cx="476250" cy="419100"/>
+                <a16:creationId xmlns:a16="http://schemas.microsoft.com/office/drawing/2014/main" id="{2CA8AA78-4B7C-44F0-A794-54D9A59B74FA}"/>
+              </a:ext>
+            </a:extLst>
+          </p:cNvPr>
+          <p:cNvSpPr>
+            <a:spLocks xmlns:a="http://schemas.openxmlformats.org/drawingml/2006/main" noGrp="1"/>
+          </p:cNvSpPr>
+          <p:nvPr/>
+        </p:nvSpPr>
+        <p:spPr>
+          <a:xfrm xmlns:a="http://schemas.openxmlformats.org/drawingml/2006/main">
+            <a:off x="1162050" y="3952875"/>
+            <a:ext cx="400050" cy="400050"/>
           </a:xfrm>
           <a:prstGeom xmlns:a="http://schemas.openxmlformats.org/drawingml/2006/main" prst="rect">
             <a:avLst/>
@@ -8614,9 +8620,9 @@
           <a:lstStyle xmlns:a="http://schemas.openxmlformats.org/drawingml/2006/main"/>
           <a:p xmlns:a="http://schemas.openxmlformats.org/drawingml/2006/main">
             <a:pPr algn="ctr">
-              <a:defRPr sz="1350" b="1">
-                <a:solidFill>
-                  <a:srgbClr val="FFFFFF"/>
+              <a:defRPr sz="1125" b="1">
+                <a:solidFill>
+                  <a:srgbClr val="2C6E73"/>
                 </a:solidFill>
                 <a:latin typeface="Arial"/>
                 <a:ea typeface="Arial"/>
@@ -8624,9 +8630,9 @@
               </a:defRPr>
             </a:pPr>
             <a:r>
-              <a:rPr sz="1350" b="1">
-                <a:solidFill>
-                  <a:srgbClr val="FFFFFF"/>
+              <a:rPr sz="1125" b="1">
+                <a:solidFill>
+                  <a:srgbClr val="2C6E73"/>
                 </a:solidFill>
                 <a:latin typeface="Arial"/>
                 <a:ea typeface="Arial"/>
@@ -8642,19 +8648,19 @@
           <p:cNvPr id="19" name="">
             <a:extLst xmlns:a="http://schemas.openxmlformats.org/drawingml/2006/main">
               <a:ext uri="{FF2B5EF4-FFF2-40B4-BE49-F238E27FC236}">
-                <a16:creationId xmlns:a16="http://schemas.microsoft.com/office/drawing/2014/main" id="{5295D85B-A8DB-498F-9275-71349703AD86}"/>
-              </a:ext>
-            </a:extLst>
-          </p:cNvPr>
-          <p:cNvSpPr>
-            <a:spLocks xmlns:a="http://schemas.openxmlformats.org/drawingml/2006/main" noGrp="1"/>
-          </p:cNvSpPr>
-          <p:nvPr/>
-        </p:nvSpPr>
-        <p:spPr>
-          <a:xfrm xmlns:a="http://schemas.openxmlformats.org/drawingml/2006/main">
-            <a:off x="1714500" y="3667125"/>
-            <a:ext cx="9429750" cy="609600"/>
+                <a16:creationId xmlns:a16="http://schemas.microsoft.com/office/drawing/2014/main" id="{79A5C111-CBD9-4BB6-8FB2-26F569BB1FC7}"/>
+              </a:ext>
+            </a:extLst>
+          </p:cNvPr>
+          <p:cNvSpPr>
+            <a:spLocks xmlns:a="http://schemas.openxmlformats.org/drawingml/2006/main" noGrp="1"/>
+          </p:cNvSpPr>
+          <p:nvPr/>
+        </p:nvSpPr>
+        <p:spPr>
+          <a:xfrm xmlns:a="http://schemas.openxmlformats.org/drawingml/2006/main">
+            <a:off x="1714500" y="3867150"/>
+            <a:ext cx="9525000" cy="809625"/>
           </a:xfrm>
           <a:prstGeom xmlns:a="http://schemas.openxmlformats.org/drawingml/2006/main" prst="rect">
             <a:avLst/>
@@ -8671,7 +8677,7 @@
           <a:lstStyle xmlns:a="http://schemas.openxmlformats.org/drawingml/2006/main"/>
           <a:p xmlns:a="http://schemas.openxmlformats.org/drawingml/2006/main">
             <a:pPr algn="l">
-              <a:defRPr sz="1500" b="0">
+              <a:defRPr sz="1725" b="0">
                 <a:solidFill>
                   <a:srgbClr val="17253A"/>
                 </a:solidFill>
@@ -8681,7 +8687,7 @@
               </a:defRPr>
             </a:pPr>
             <a:r>
-              <a:rPr sz="1500" b="0">
+              <a:rPr sz="1725" b="0">
                 <a:solidFill>
                   <a:srgbClr val="17253A"/>
                 </a:solidFill>
@@ -8689,7 +8695,7 @@
                 <a:ea typeface="Arial"/>
                 <a:cs typeface="Arial"/>
               </a:rPr>
-              <a:t>Complete the calculation: 468,750; 468,800; 469,000.</a:t>
+              <a:t>Nearest 100: tens digit 5, so round up → 468,800</a:t>
             </a:r>
           </a:p>
         </p:txBody>
@@ -8699,28 +8705,30 @@
           <p:cNvPr id="20" name="">
             <a:extLst xmlns:a="http://schemas.openxmlformats.org/drawingml/2006/main">
               <a:ext uri="{FF2B5EF4-FFF2-40B4-BE49-F238E27FC236}">
-                <a16:creationId xmlns:a16="http://schemas.microsoft.com/office/drawing/2014/main" id="{13AB69F5-8079-408D-BBA5-935452184BF9}"/>
-              </a:ext>
-            </a:extLst>
-          </p:cNvPr>
-          <p:cNvSpPr>
-            <a:spLocks xmlns:a="http://schemas.openxmlformats.org/drawingml/2006/main" noGrp="1"/>
-          </p:cNvSpPr>
-          <p:nvPr/>
-        </p:nvSpPr>
-        <p:spPr>
-          <a:xfrm xmlns:a="http://schemas.openxmlformats.org/drawingml/2006/main">
-            <a:off x="1000125" y="4476750"/>
-            <a:ext cx="476250" cy="476250"/>
-          </a:xfrm>
-          <a:prstGeom xmlns:a="http://schemas.openxmlformats.org/drawingml/2006/main" prst="ellipse">
+                <a16:creationId xmlns:a16="http://schemas.microsoft.com/office/drawing/2014/main" id="{6DDC1DA3-5908-4E76-A5DD-93635511B197}"/>
+              </a:ext>
+            </a:extLst>
+          </p:cNvPr>
+          <p:cNvSpPr>
+            <a:spLocks xmlns:a="http://schemas.openxmlformats.org/drawingml/2006/main" noGrp="1"/>
+          </p:cNvSpPr>
+          <p:nvPr/>
+        </p:nvSpPr>
+        <p:spPr>
+          <a:xfrm xmlns:a="http://schemas.openxmlformats.org/drawingml/2006/main">
+            <a:off x="1714500" y="4695825"/>
+            <a:ext cx="9334500" cy="9525"/>
+          </a:xfrm>
+          <a:prstGeom xmlns:a="http://schemas.openxmlformats.org/drawingml/2006/main" prst="rect">
             <a:avLst/>
           </a:prstGeom>
           <a:solidFill xmlns:a="http://schemas.openxmlformats.org/drawingml/2006/main">
-            <a:srgbClr val="2C6E73"/>
+            <a:srgbClr val="D9E0E6"/>
           </a:solidFill>
           <a:ln xmlns:a="http://schemas.openxmlformats.org/drawingml/2006/main" w="0">
-            <a:noFill/>
+            <a:solidFill>
+              <a:srgbClr val="D9E0E6"/>
+            </a:solidFill>
           </a:ln>
         </p:spPr>
       </p:sp>
@@ -8729,19 +8737,19 @@
           <p:cNvPr id="21" name="">
             <a:extLst xmlns:a="http://schemas.openxmlformats.org/drawingml/2006/main">
               <a:ext uri="{FF2B5EF4-FFF2-40B4-BE49-F238E27FC236}">
-                <a16:creationId xmlns:a16="http://schemas.microsoft.com/office/drawing/2014/main" id="{8DF31F89-34E8-4393-85AA-604C4A50BB5E}"/>
-              </a:ext>
-            </a:extLst>
-          </p:cNvPr>
-          <p:cNvSpPr>
-            <a:spLocks xmlns:a="http://schemas.openxmlformats.org/drawingml/2006/main" noGrp="1"/>
-          </p:cNvSpPr>
-          <p:nvPr/>
-        </p:nvSpPr>
-        <p:spPr>
-          <a:xfrm xmlns:a="http://schemas.openxmlformats.org/drawingml/2006/main">
-            <a:off x="1000125" y="4505325"/>
-            <a:ext cx="476250" cy="419100"/>
+                <a16:creationId xmlns:a16="http://schemas.microsoft.com/office/drawing/2014/main" id="{AFB074A1-078F-48E9-9567-F099319B5492}"/>
+              </a:ext>
+            </a:extLst>
+          </p:cNvPr>
+          <p:cNvSpPr>
+            <a:spLocks xmlns:a="http://schemas.openxmlformats.org/drawingml/2006/main" noGrp="1"/>
+          </p:cNvSpPr>
+          <p:nvPr/>
+        </p:nvSpPr>
+        <p:spPr>
+          <a:xfrm xmlns:a="http://schemas.openxmlformats.org/drawingml/2006/main">
+            <a:off x="1162050" y="4829175"/>
+            <a:ext cx="400050" cy="400050"/>
           </a:xfrm>
           <a:prstGeom xmlns:a="http://schemas.openxmlformats.org/drawingml/2006/main" prst="rect">
             <a:avLst/>
@@ -8758,9 +8766,9 @@
           <a:lstStyle xmlns:a="http://schemas.openxmlformats.org/drawingml/2006/main"/>
           <a:p xmlns:a="http://schemas.openxmlformats.org/drawingml/2006/main">
             <a:pPr algn="ctr">
-              <a:defRPr sz="1350" b="1">
-                <a:solidFill>
-                  <a:srgbClr val="FFFFFF"/>
+              <a:defRPr sz="1125" b="1">
+                <a:solidFill>
+                  <a:srgbClr val="2F785D"/>
                 </a:solidFill>
                 <a:latin typeface="Arial"/>
                 <a:ea typeface="Arial"/>
@@ -8768,9 +8776,9 @@
               </a:defRPr>
             </a:pPr>
             <a:r>
-              <a:rPr sz="1350" b="1">
-                <a:solidFill>
-                  <a:srgbClr val="FFFFFF"/>
+              <a:rPr sz="1125" b="1">
+                <a:solidFill>
+                  <a:srgbClr val="2F785D"/>
                 </a:solidFill>
                 <a:latin typeface="Arial"/>
                 <a:ea typeface="Arial"/>
@@ -8786,19 +8794,19 @@
           <p:cNvPr id="22" name="">
             <a:extLst xmlns:a="http://schemas.openxmlformats.org/drawingml/2006/main">
               <a:ext uri="{FF2B5EF4-FFF2-40B4-BE49-F238E27FC236}">
-                <a16:creationId xmlns:a16="http://schemas.microsoft.com/office/drawing/2014/main" id="{9080373D-93C2-4793-8EB7-462DE8429D73}"/>
-              </a:ext>
-            </a:extLst>
-          </p:cNvPr>
-          <p:cNvSpPr>
-            <a:spLocks xmlns:a="http://schemas.openxmlformats.org/drawingml/2006/main" noGrp="1"/>
-          </p:cNvSpPr>
-          <p:nvPr/>
-        </p:nvSpPr>
-        <p:spPr>
-          <a:xfrm xmlns:a="http://schemas.openxmlformats.org/drawingml/2006/main">
-            <a:off x="1714500" y="4410075"/>
-            <a:ext cx="9429750" cy="609600"/>
+                <a16:creationId xmlns:a16="http://schemas.microsoft.com/office/drawing/2014/main" id="{42B83A78-AC34-479F-8754-26FF6727E6F7}"/>
+              </a:ext>
+            </a:extLst>
+          </p:cNvPr>
+          <p:cNvSpPr>
+            <a:spLocks xmlns:a="http://schemas.openxmlformats.org/drawingml/2006/main" noGrp="1"/>
+          </p:cNvSpPr>
+          <p:nvPr/>
+        </p:nvSpPr>
+        <p:spPr>
+          <a:xfrm xmlns:a="http://schemas.openxmlformats.org/drawingml/2006/main">
+            <a:off x="1714500" y="4743450"/>
+            <a:ext cx="9525000" cy="809625"/>
           </a:xfrm>
           <a:prstGeom xmlns:a="http://schemas.openxmlformats.org/drawingml/2006/main" prst="rect">
             <a:avLst/>
@@ -8815,7 +8823,7 @@
           <a:lstStyle xmlns:a="http://schemas.openxmlformats.org/drawingml/2006/main"/>
           <a:p xmlns:a="http://schemas.openxmlformats.org/drawingml/2006/main">
             <a:pPr algn="l">
-              <a:defRPr sz="1500" b="1">
+              <a:defRPr sz="1725" b="1">
                 <a:solidFill>
                   <a:srgbClr val="2F785D"/>
                 </a:solidFill>
@@ -8825,7 +8833,7 @@
               </a:defRPr>
             </a:pPr>
             <a:r>
-              <a:rPr sz="1500" b="1">
+              <a:rPr sz="1725" b="1">
                 <a:solidFill>
                   <a:srgbClr val="2F785D"/>
                 </a:solidFill>
@@ -8833,7 +8841,7 @@
                 <a:ea typeface="Arial"/>
                 <a:cs typeface="Arial"/>
               </a:rPr>
-              <a:t>Check the result: Round to the nearer multiple and replace following digits with zeros.</a:t>
+              <a:t>Nearest 1,000: hundreds digit 7, so round up → 469,000</a:t>
             </a:r>
           </a:p>
         </p:txBody>
@@ -8841,7 +8849,7 @@
     </p:spTree>
     <p:extLst>
       <p:ext uri="{BB962C8B-B14F-4D97-AF65-F5344CB8AC3E}">
-        <p14:creationId xmlns:p14="http://schemas.microsoft.com/office/powerpoint/2010/main" val="1727449810"/>
+        <p14:creationId xmlns:p14="http://schemas.microsoft.com/office/powerpoint/2010/main" val="2015410937"/>
       </p:ext>
     </p:extLst>
   </p:cSld>
@@ -9134,7 +9142,7 @@
           <p:cNvPr id="15" name="">
             <a:extLst xmlns:a="http://schemas.openxmlformats.org/drawingml/2006/main">
               <a:ext uri="{FF2B5EF4-FFF2-40B4-BE49-F238E27FC236}">
-                <a16:creationId xmlns:a16="http://schemas.microsoft.com/office/drawing/2014/main" id="{2194ED2E-5456-41F5-9E43-3FFC9F481780}"/>
+                <a16:creationId xmlns:a16="http://schemas.microsoft.com/office/drawing/2014/main" id="{DD88130B-440B-46D6-826F-D0A0239377C1}"/>
               </a:ext>
             </a:extLst>
           </p:cNvPr>
@@ -9166,7 +9174,7 @@
           <p:cNvPr id="2" name="">
             <a:extLst xmlns:a="http://schemas.openxmlformats.org/drawingml/2006/main">
               <a:ext uri="{FF2B5EF4-FFF2-40B4-BE49-F238E27FC236}">
-                <a16:creationId xmlns:a16="http://schemas.microsoft.com/office/drawing/2014/main" id="{035605A1-315F-4D04-91F3-1A8B6E43C2F6}"/>
+                <a16:creationId xmlns:a16="http://schemas.microsoft.com/office/drawing/2014/main" id="{9A757198-6CCE-4963-8194-9442C34289A2}"/>
               </a:ext>
             </a:extLst>
           </p:cNvPr>
@@ -9223,7 +9231,7 @@
           <p:cNvPr id="3" name="">
             <a:extLst xmlns:a="http://schemas.openxmlformats.org/drawingml/2006/main">
               <a:ext uri="{FF2B5EF4-FFF2-40B4-BE49-F238E27FC236}">
-                <a16:creationId xmlns:a16="http://schemas.microsoft.com/office/drawing/2014/main" id="{93C5C3DD-1C25-4366-963D-C379DE9F157A}"/>
+                <a16:creationId xmlns:a16="http://schemas.microsoft.com/office/drawing/2014/main" id="{5EF16FE9-1E4C-48F4-89BC-67C5F4B54C9B}"/>
               </a:ext>
             </a:extLst>
           </p:cNvPr>
@@ -9255,7 +9263,7 @@
           <p:cNvPr id="4" name="">
             <a:extLst xmlns:a="http://schemas.openxmlformats.org/drawingml/2006/main">
               <a:ext uri="{FF2B5EF4-FFF2-40B4-BE49-F238E27FC236}">
-                <a16:creationId xmlns:a16="http://schemas.microsoft.com/office/drawing/2014/main" id="{0F0A76AA-8FCA-43C7-801E-E237E723C8E9}"/>
+                <a16:creationId xmlns:a16="http://schemas.microsoft.com/office/drawing/2014/main" id="{9DF042CE-8200-4C5B-BC9A-2101DA3C4714}"/>
               </a:ext>
             </a:extLst>
           </p:cNvPr>
@@ -9312,7 +9320,7 @@
           <p:cNvPr id="5" name="">
             <a:extLst xmlns:a="http://schemas.openxmlformats.org/drawingml/2006/main">
               <a:ext uri="{FF2B5EF4-FFF2-40B4-BE49-F238E27FC236}">
-                <a16:creationId xmlns:a16="http://schemas.microsoft.com/office/drawing/2014/main" id="{FF97F469-9726-4BC6-B1DF-21DB95681727}"/>
+                <a16:creationId xmlns:a16="http://schemas.microsoft.com/office/drawing/2014/main" id="{30807EBD-17EA-4F44-B192-0B7597B77B5C}"/>
               </a:ext>
             </a:extLst>
           </p:cNvPr>
@@ -9369,7 +9377,7 @@
           <p:cNvPr id="6" name="">
             <a:extLst xmlns:a="http://schemas.openxmlformats.org/drawingml/2006/main">
               <a:ext uri="{FF2B5EF4-FFF2-40B4-BE49-F238E27FC236}">
-                <a16:creationId xmlns:a16="http://schemas.microsoft.com/office/drawing/2014/main" id="{961918CE-EEF3-452E-99C5-D1A4DBC11FDA}"/>
+                <a16:creationId xmlns:a16="http://schemas.microsoft.com/office/drawing/2014/main" id="{74936E79-A2AB-42D5-B80A-156147A23996}"/>
               </a:ext>
             </a:extLst>
           </p:cNvPr>
@@ -9426,7 +9434,7 @@
           <p:cNvPr id="7" name="">
             <a:extLst xmlns:a="http://schemas.openxmlformats.org/drawingml/2006/main">
               <a:ext uri="{FF2B5EF4-FFF2-40B4-BE49-F238E27FC236}">
-                <a16:creationId xmlns:a16="http://schemas.microsoft.com/office/drawing/2014/main" id="{B0DBE9DB-8FE2-405A-820B-3E81FD0048A0}"/>
+                <a16:creationId xmlns:a16="http://schemas.microsoft.com/office/drawing/2014/main" id="{AFB1F763-46F1-40D5-9BB7-552BF0B35C07}"/>
               </a:ext>
             </a:extLst>
           </p:cNvPr>
@@ -9458,7 +9466,7 @@
           <p:cNvPr id="8" name="">
             <a:extLst xmlns:a="http://schemas.openxmlformats.org/drawingml/2006/main">
               <a:ext uri="{FF2B5EF4-FFF2-40B4-BE49-F238E27FC236}">
-                <a16:creationId xmlns:a16="http://schemas.microsoft.com/office/drawing/2014/main" id="{92CE1749-4D34-4527-9077-5495F4E722D4}"/>
+                <a16:creationId xmlns:a16="http://schemas.microsoft.com/office/drawing/2014/main" id="{BEACD3D4-BE38-4525-88D4-C994198C9579}"/>
               </a:ext>
             </a:extLst>
           </p:cNvPr>
@@ -9515,7 +9523,7 @@
           <p:cNvPr id="9" name="">
             <a:extLst xmlns:a="http://schemas.openxmlformats.org/drawingml/2006/main">
               <a:ext uri="{FF2B5EF4-FFF2-40B4-BE49-F238E27FC236}">
-                <a16:creationId xmlns:a16="http://schemas.microsoft.com/office/drawing/2014/main" id="{5C9A6F31-43D3-4F7B-90B1-F3ECBA044B14}"/>
+                <a16:creationId xmlns:a16="http://schemas.microsoft.com/office/drawing/2014/main" id="{FEE9AFAD-6B19-42FB-BD75-7671DE32A1AA}"/>
               </a:ext>
             </a:extLst>
           </p:cNvPr>
@@ -9572,7 +9580,7 @@
           <p:cNvPr id="10" name="">
             <a:extLst xmlns:a="http://schemas.openxmlformats.org/drawingml/2006/main">
               <a:ext uri="{FF2B5EF4-FFF2-40B4-BE49-F238E27FC236}">
-                <a16:creationId xmlns:a16="http://schemas.microsoft.com/office/drawing/2014/main" id="{B5A8D50D-E79E-41A4-B343-D6CD4BB5E06F}"/>
+                <a16:creationId xmlns:a16="http://schemas.microsoft.com/office/drawing/2014/main" id="{B44CBC3E-DD1E-4879-9B65-AFF2D6E0E6CE}"/>
               </a:ext>
             </a:extLst>
           </p:cNvPr>
@@ -9629,7 +9637,7 @@
           <p:cNvPr id="11" name="">
             <a:extLst xmlns:a="http://schemas.openxmlformats.org/drawingml/2006/main">
               <a:ext uri="{FF2B5EF4-FFF2-40B4-BE49-F238E27FC236}">
-                <a16:creationId xmlns:a16="http://schemas.microsoft.com/office/drawing/2014/main" id="{F97642C4-64FE-49F6-B7BB-C73332550BBE}"/>
+                <a16:creationId xmlns:a16="http://schemas.microsoft.com/office/drawing/2014/main" id="{B0E43D22-B553-4E7F-BFD8-CF362834A354}"/>
               </a:ext>
             </a:extLst>
           </p:cNvPr>
@@ -9686,7 +9694,7 @@
           <p:cNvPr id="12" name="">
             <a:extLst xmlns:a="http://schemas.openxmlformats.org/drawingml/2006/main">
               <a:ext uri="{FF2B5EF4-FFF2-40B4-BE49-F238E27FC236}">
-                <a16:creationId xmlns:a16="http://schemas.microsoft.com/office/drawing/2014/main" id="{A946C2B7-A4D3-4E62-8981-E333A238B793}"/>
+                <a16:creationId xmlns:a16="http://schemas.microsoft.com/office/drawing/2014/main" id="{950BC8CD-70A8-4686-8670-4291C2BDFB5F}"/>
               </a:ext>
             </a:extLst>
           </p:cNvPr>
@@ -9718,7 +9726,7 @@
           <p:cNvPr id="13" name="">
             <a:extLst xmlns:a="http://schemas.openxmlformats.org/drawingml/2006/main">
               <a:ext uri="{FF2B5EF4-FFF2-40B4-BE49-F238E27FC236}">
-                <a16:creationId xmlns:a16="http://schemas.microsoft.com/office/drawing/2014/main" id="{1BBFEC15-7AF4-4DB4-89C5-8B9DA5992B0D}"/>
+                <a16:creationId xmlns:a16="http://schemas.microsoft.com/office/drawing/2014/main" id="{4E0D7308-141D-4059-A714-92C506CEB5C0}"/>
               </a:ext>
             </a:extLst>
           </p:cNvPr>
@@ -9775,7 +9783,7 @@
           <p:cNvPr id="14" name="">
             <a:extLst xmlns:a="http://schemas.openxmlformats.org/drawingml/2006/main">
               <a:ext uri="{FF2B5EF4-FFF2-40B4-BE49-F238E27FC236}">
-                <a16:creationId xmlns:a16="http://schemas.microsoft.com/office/drawing/2014/main" id="{D1D16EF6-9E52-41AC-9E20-480A8F08B829}"/>
+                <a16:creationId xmlns:a16="http://schemas.microsoft.com/office/drawing/2014/main" id="{35AC8DF3-8734-4C07-9902-DCD24671F2C3}"/>
               </a:ext>
             </a:extLst>
           </p:cNvPr>
@@ -9830,7 +9838,7 @@
     </p:spTree>
     <p:extLst>
       <p:ext uri="{BB962C8B-B14F-4D97-AF65-F5344CB8AC3E}">
-        <p14:creationId xmlns:p14="http://schemas.microsoft.com/office/powerpoint/2010/main" val="537979291"/>
+        <p14:creationId xmlns:p14="http://schemas.microsoft.com/office/powerpoint/2010/main" val="1555794124"/>
       </p:ext>
     </p:extLst>
   </p:cSld>
@@ -10031,7 +10039,7 @@
           <p:cNvPr id="16" name="">
             <a:extLst xmlns:a="http://schemas.openxmlformats.org/drawingml/2006/main">
               <a:ext uri="{FF2B5EF4-FFF2-40B4-BE49-F238E27FC236}">
-                <a16:creationId xmlns:a16="http://schemas.microsoft.com/office/drawing/2014/main" id="{A931774A-D9AB-4E8D-BBF2-1FCE6490BB31}"/>
+                <a16:creationId xmlns:a16="http://schemas.microsoft.com/office/drawing/2014/main" id="{14910F10-94FE-408C-BD42-CA66949F98B8}"/>
               </a:ext>
             </a:extLst>
           </p:cNvPr>
@@ -10063,7 +10071,7 @@
           <p:cNvPr id="2" name="">
             <a:extLst xmlns:a="http://schemas.openxmlformats.org/drawingml/2006/main">
               <a:ext uri="{FF2B5EF4-FFF2-40B4-BE49-F238E27FC236}">
-                <a16:creationId xmlns:a16="http://schemas.microsoft.com/office/drawing/2014/main" id="{B9EA2C1A-D2B4-4B2A-B053-53292CD403F2}"/>
+                <a16:creationId xmlns:a16="http://schemas.microsoft.com/office/drawing/2014/main" id="{2C4F4D34-3EBB-4791-90EC-853F8326CE0B}"/>
               </a:ext>
             </a:extLst>
           </p:cNvPr>
@@ -10120,7 +10128,7 @@
           <p:cNvPr id="3" name="">
             <a:extLst xmlns:a="http://schemas.openxmlformats.org/drawingml/2006/main">
               <a:ext uri="{FF2B5EF4-FFF2-40B4-BE49-F238E27FC236}">
-                <a16:creationId xmlns:a16="http://schemas.microsoft.com/office/drawing/2014/main" id="{066018F2-4CA1-4E23-8C6D-8B27650DB7AC}"/>
+                <a16:creationId xmlns:a16="http://schemas.microsoft.com/office/drawing/2014/main" id="{52ACD7F2-F7C6-4F10-9BB9-F4ABCF92F3FE}"/>
               </a:ext>
             </a:extLst>
           </p:cNvPr>
@@ -10152,7 +10160,7 @@
           <p:cNvPr id="4" name="">
             <a:extLst xmlns:a="http://schemas.openxmlformats.org/drawingml/2006/main">
               <a:ext uri="{FF2B5EF4-FFF2-40B4-BE49-F238E27FC236}">
-                <a16:creationId xmlns:a16="http://schemas.microsoft.com/office/drawing/2014/main" id="{3A74C8EA-BFD8-4FDE-9855-FBF84D74F536}"/>
+                <a16:creationId xmlns:a16="http://schemas.microsoft.com/office/drawing/2014/main" id="{1DB87B69-F426-4233-B366-22D4C43B0D74}"/>
               </a:ext>
             </a:extLst>
           </p:cNvPr>
@@ -10209,7 +10217,7 @@
           <p:cNvPr id="5" name="">
             <a:extLst xmlns:a="http://schemas.openxmlformats.org/drawingml/2006/main">
               <a:ext uri="{FF2B5EF4-FFF2-40B4-BE49-F238E27FC236}">
-                <a16:creationId xmlns:a16="http://schemas.microsoft.com/office/drawing/2014/main" id="{7B69B6BF-9B1C-4AE4-8615-A7889BAC7F39}"/>
+                <a16:creationId xmlns:a16="http://schemas.microsoft.com/office/drawing/2014/main" id="{97BCADB8-57BE-40DA-970A-494CD221B373}"/>
               </a:ext>
             </a:extLst>
           </p:cNvPr>
@@ -10266,7 +10274,7 @@
           <p:cNvPr id="6" name="">
             <a:extLst xmlns:a="http://schemas.openxmlformats.org/drawingml/2006/main">
               <a:ext uri="{FF2B5EF4-FFF2-40B4-BE49-F238E27FC236}">
-                <a16:creationId xmlns:a16="http://schemas.microsoft.com/office/drawing/2014/main" id="{8BAA08F8-201C-43CF-8497-990810DDEE43}"/>
+                <a16:creationId xmlns:a16="http://schemas.microsoft.com/office/drawing/2014/main" id="{4BD748B1-342A-4971-BE5E-95210BB4E677}"/>
               </a:ext>
             </a:extLst>
           </p:cNvPr>
@@ -10323,7 +10331,7 @@
           <p:cNvPr id="7" name="">
             <a:extLst xmlns:a="http://schemas.openxmlformats.org/drawingml/2006/main">
               <a:ext uri="{FF2B5EF4-FFF2-40B4-BE49-F238E27FC236}">
-                <a16:creationId xmlns:a16="http://schemas.microsoft.com/office/drawing/2014/main" id="{E5CDBA16-EBBD-47E0-9B88-87186B6B4ED3}"/>
+                <a16:creationId xmlns:a16="http://schemas.microsoft.com/office/drawing/2014/main" id="{51BEA007-A4C0-49DF-A4F6-683EE2FBA426}"/>
               </a:ext>
             </a:extLst>
           </p:cNvPr>
@@ -10355,7 +10363,7 @@
           <p:cNvPr id="8" name="">
             <a:extLst xmlns:a="http://schemas.openxmlformats.org/drawingml/2006/main">
               <a:ext uri="{FF2B5EF4-FFF2-40B4-BE49-F238E27FC236}">
-                <a16:creationId xmlns:a16="http://schemas.microsoft.com/office/drawing/2014/main" id="{D3B6E31C-DFB2-48B7-A667-F73F81C81281}"/>
+                <a16:creationId xmlns:a16="http://schemas.microsoft.com/office/drawing/2014/main" id="{A5B4C471-BFB9-4FFB-A2BC-16D3F7B0627C}"/>
               </a:ext>
             </a:extLst>
           </p:cNvPr>
@@ -10412,7 +10420,7 @@
           <p:cNvPr id="9" name="">
             <a:extLst xmlns:a="http://schemas.openxmlformats.org/drawingml/2006/main">
               <a:ext uri="{FF2B5EF4-FFF2-40B4-BE49-F238E27FC236}">
-                <a16:creationId xmlns:a16="http://schemas.microsoft.com/office/drawing/2014/main" id="{38E2FD00-CE32-4FCC-A383-7D7F8128844E}"/>
+                <a16:creationId xmlns:a16="http://schemas.microsoft.com/office/drawing/2014/main" id="{B1DC07BF-C35C-472D-A751-4D73BC60DE64}"/>
               </a:ext>
             </a:extLst>
           </p:cNvPr>
@@ -10469,7 +10477,7 @@
           <p:cNvPr id="10" name="">
             <a:extLst xmlns:a="http://schemas.openxmlformats.org/drawingml/2006/main">
               <a:ext uri="{FF2B5EF4-FFF2-40B4-BE49-F238E27FC236}">
-                <a16:creationId xmlns:a16="http://schemas.microsoft.com/office/drawing/2014/main" id="{7772448E-E384-4B4D-B138-E15BBDD4961B}"/>
+                <a16:creationId xmlns:a16="http://schemas.microsoft.com/office/drawing/2014/main" id="{8F5D65CC-4C66-4EBA-A95F-B3707F5E40C6}"/>
               </a:ext>
             </a:extLst>
           </p:cNvPr>
@@ -10526,7 +10534,7 @@
           <p:cNvPr id="11" name="">
             <a:extLst xmlns:a="http://schemas.openxmlformats.org/drawingml/2006/main">
               <a:ext uri="{FF2B5EF4-FFF2-40B4-BE49-F238E27FC236}">
-                <a16:creationId xmlns:a16="http://schemas.microsoft.com/office/drawing/2014/main" id="{76C3EEE1-B960-4996-9E09-AF53A4283186}"/>
+                <a16:creationId xmlns:a16="http://schemas.microsoft.com/office/drawing/2014/main" id="{091213B7-22C5-4BC6-9B4B-161E27767886}"/>
               </a:ext>
             </a:extLst>
           </p:cNvPr>
@@ -10583,7 +10591,7 @@
           <p:cNvPr id="12" name="">
             <a:extLst xmlns:a="http://schemas.openxmlformats.org/drawingml/2006/main">
               <a:ext uri="{FF2B5EF4-FFF2-40B4-BE49-F238E27FC236}">
-                <a16:creationId xmlns:a16="http://schemas.microsoft.com/office/drawing/2014/main" id="{E0D7B03C-ECD9-4256-BE02-0A3D510252CD}"/>
+                <a16:creationId xmlns:a16="http://schemas.microsoft.com/office/drawing/2014/main" id="{1A3F0FC1-AACD-406F-9395-9A745BF122FB}"/>
               </a:ext>
             </a:extLst>
           </p:cNvPr>
@@ -10640,7 +10648,7 @@
           <p:cNvPr id="13" name="">
             <a:extLst xmlns:a="http://schemas.openxmlformats.org/drawingml/2006/main">
               <a:ext uri="{FF2B5EF4-FFF2-40B4-BE49-F238E27FC236}">
-                <a16:creationId xmlns:a16="http://schemas.microsoft.com/office/drawing/2014/main" id="{3848435C-A24E-4D82-90D7-C822FCF1BC51}"/>
+                <a16:creationId xmlns:a16="http://schemas.microsoft.com/office/drawing/2014/main" id="{21332776-8D2D-4E08-A2A0-D959948D6683}"/>
               </a:ext>
             </a:extLst>
           </p:cNvPr>
@@ -10697,7 +10705,7 @@
           <p:cNvPr id="14" name="">
             <a:extLst xmlns:a="http://schemas.openxmlformats.org/drawingml/2006/main">
               <a:ext uri="{FF2B5EF4-FFF2-40B4-BE49-F238E27FC236}">
-                <a16:creationId xmlns:a16="http://schemas.microsoft.com/office/drawing/2014/main" id="{A6D11672-3D86-48C1-B992-B33CA4BAD486}"/>
+                <a16:creationId xmlns:a16="http://schemas.microsoft.com/office/drawing/2014/main" id="{9B8A5632-C5EE-40E6-97BD-1DE8355502C0}"/>
               </a:ext>
             </a:extLst>
           </p:cNvPr>
@@ -10754,7 +10762,7 @@
           <p:cNvPr id="15" name="">
             <a:extLst xmlns:a="http://schemas.openxmlformats.org/drawingml/2006/main">
               <a:ext uri="{FF2B5EF4-FFF2-40B4-BE49-F238E27FC236}">
-                <a16:creationId xmlns:a16="http://schemas.microsoft.com/office/drawing/2014/main" id="{878C80AC-3739-492D-AAC0-5ED075A9CD53}"/>
+                <a16:creationId xmlns:a16="http://schemas.microsoft.com/office/drawing/2014/main" id="{65F2BD59-0CEC-4A2B-B3D6-CE6307E773CD}"/>
               </a:ext>
             </a:extLst>
           </p:cNvPr>
@@ -10809,7 +10817,7 @@
     </p:spTree>
     <p:extLst>
       <p:ext uri="{BB962C8B-B14F-4D97-AF65-F5344CB8AC3E}">
-        <p14:creationId xmlns:p14="http://schemas.microsoft.com/office/powerpoint/2010/main" val="691625439"/>
+        <p14:creationId xmlns:p14="http://schemas.microsoft.com/office/powerpoint/2010/main" val="459102847"/>
       </p:ext>
     </p:extLst>
   </p:cSld>
@@ -10964,7 +10972,7 @@
           <p:cNvPr id="16" name="">
             <a:extLst xmlns:a="http://schemas.openxmlformats.org/drawingml/2006/main">
               <a:ext uri="{FF2B5EF4-FFF2-40B4-BE49-F238E27FC236}">
-                <a16:creationId xmlns:a16="http://schemas.microsoft.com/office/drawing/2014/main" id="{E5FC9E8B-022E-49BF-A026-0FDCD96E851F}"/>
+                <a16:creationId xmlns:a16="http://schemas.microsoft.com/office/drawing/2014/main" id="{E390DB91-7B0D-4480-88A8-CF5C05103C1E}"/>
               </a:ext>
             </a:extLst>
           </p:cNvPr>
@@ -10996,7 +11004,7 @@
           <p:cNvPr id="2" name="">
             <a:extLst xmlns:a="http://schemas.openxmlformats.org/drawingml/2006/main">
               <a:ext uri="{FF2B5EF4-FFF2-40B4-BE49-F238E27FC236}">
-                <a16:creationId xmlns:a16="http://schemas.microsoft.com/office/drawing/2014/main" id="{2034DAF5-F147-48D3-B9A0-95E3A9DCCD6E}"/>
+                <a16:creationId xmlns:a16="http://schemas.microsoft.com/office/drawing/2014/main" id="{C60F7E75-BA47-4A94-A790-DA054CA23829}"/>
               </a:ext>
             </a:extLst>
           </p:cNvPr>
@@ -11053,7 +11061,7 @@
           <p:cNvPr id="3" name="">
             <a:extLst xmlns:a="http://schemas.openxmlformats.org/drawingml/2006/main">
               <a:ext uri="{FF2B5EF4-FFF2-40B4-BE49-F238E27FC236}">
-                <a16:creationId xmlns:a16="http://schemas.microsoft.com/office/drawing/2014/main" id="{82426C6C-0A11-4BBE-82FC-588CDA19BCF3}"/>
+                <a16:creationId xmlns:a16="http://schemas.microsoft.com/office/drawing/2014/main" id="{71004B9E-0633-462C-BD77-F6F6C58D372B}"/>
               </a:ext>
             </a:extLst>
           </p:cNvPr>
@@ -11085,7 +11093,7 @@
           <p:cNvPr id="4" name="">
             <a:extLst xmlns:a="http://schemas.openxmlformats.org/drawingml/2006/main">
               <a:ext uri="{FF2B5EF4-FFF2-40B4-BE49-F238E27FC236}">
-                <a16:creationId xmlns:a16="http://schemas.microsoft.com/office/drawing/2014/main" id="{FA3BCF3C-E2F5-46B9-BFBD-FB93887BF9C0}"/>
+                <a16:creationId xmlns:a16="http://schemas.microsoft.com/office/drawing/2014/main" id="{AA8F0DC7-62C7-4E01-B58B-EF2A4E3BA77D}"/>
               </a:ext>
             </a:extLst>
           </p:cNvPr>
@@ -11142,7 +11150,7 @@
           <p:cNvPr id="5" name="">
             <a:extLst xmlns:a="http://schemas.openxmlformats.org/drawingml/2006/main">
               <a:ext uri="{FF2B5EF4-FFF2-40B4-BE49-F238E27FC236}">
-                <a16:creationId xmlns:a16="http://schemas.microsoft.com/office/drawing/2014/main" id="{E1FD8138-E62A-4693-BF5A-396AEA116CB2}"/>
+                <a16:creationId xmlns:a16="http://schemas.microsoft.com/office/drawing/2014/main" id="{269B90B9-A689-4F86-8A86-E2A609C51CC7}"/>
               </a:ext>
             </a:extLst>
           </p:cNvPr>
@@ -11199,7 +11207,7 @@
           <p:cNvPr id="6" name="">
             <a:extLst xmlns:a="http://schemas.openxmlformats.org/drawingml/2006/main">
               <a:ext uri="{FF2B5EF4-FFF2-40B4-BE49-F238E27FC236}">
-                <a16:creationId xmlns:a16="http://schemas.microsoft.com/office/drawing/2014/main" id="{5DA32AED-A082-42C3-8FD2-C8A56EF37ABD}"/>
+                <a16:creationId xmlns:a16="http://schemas.microsoft.com/office/drawing/2014/main" id="{2F9080AA-F894-4870-A35B-AC3EA6FD92B6}"/>
               </a:ext>
             </a:extLst>
           </p:cNvPr>
@@ -11256,7 +11264,7 @@
           <p:cNvPr id="7" name="">
             <a:extLst xmlns:a="http://schemas.openxmlformats.org/drawingml/2006/main">
               <a:ext uri="{FF2B5EF4-FFF2-40B4-BE49-F238E27FC236}">
-                <a16:creationId xmlns:a16="http://schemas.microsoft.com/office/drawing/2014/main" id="{02ED4315-C3BF-40B8-A9B2-4B8F8D91CED5}"/>
+                <a16:creationId xmlns:a16="http://schemas.microsoft.com/office/drawing/2014/main" id="{911693E0-0AC8-4A62-8092-B37786056619}"/>
               </a:ext>
             </a:extLst>
           </p:cNvPr>
@@ -11288,7 +11296,7 @@
           <p:cNvPr id="8" name="">
             <a:extLst xmlns:a="http://schemas.openxmlformats.org/drawingml/2006/main">
               <a:ext uri="{FF2B5EF4-FFF2-40B4-BE49-F238E27FC236}">
-                <a16:creationId xmlns:a16="http://schemas.microsoft.com/office/drawing/2014/main" id="{1193F69E-75D9-4087-BB4F-37E5A2D02620}"/>
+                <a16:creationId xmlns:a16="http://schemas.microsoft.com/office/drawing/2014/main" id="{30BE5CCA-97D2-4A72-A1A8-0F562CFA1C42}"/>
               </a:ext>
             </a:extLst>
           </p:cNvPr>
@@ -11345,7 +11353,7 @@
           <p:cNvPr id="9" name="">
             <a:extLst xmlns:a="http://schemas.openxmlformats.org/drawingml/2006/main">
               <a:ext uri="{FF2B5EF4-FFF2-40B4-BE49-F238E27FC236}">
-                <a16:creationId xmlns:a16="http://schemas.microsoft.com/office/drawing/2014/main" id="{ADB407C7-6A50-4689-994D-D3513CF96E68}"/>
+                <a16:creationId xmlns:a16="http://schemas.microsoft.com/office/drawing/2014/main" id="{12218F17-1F78-4E60-A6BE-EEC3C554FD38}"/>
               </a:ext>
             </a:extLst>
           </p:cNvPr>
@@ -11406,7 +11414,7 @@
           <p:nvPr/>
         </p:nvPicPr>
         <p:blipFill>
-          <a:blip xmlns:r="http://schemas.openxmlformats.org/officeDocument/2006/relationships" xmlns:a="http://schemas.openxmlformats.org/drawingml/2006/main" r:embed="Rd0b4e8075a984e40"/>
+          <a:blip xmlns:r="http://schemas.openxmlformats.org/officeDocument/2006/relationships" xmlns:a="http://schemas.openxmlformats.org/drawingml/2006/main" r:embed="Rc8cb6b518d544aa5"/>
           <a:stretch xmlns:a="http://schemas.openxmlformats.org/drawingml/2006/main"/>
         </p:blipFill>
         <p:spPr>
@@ -11424,7 +11432,7 @@
           <p:cNvPr id="11" name="">
             <a:extLst xmlns:a="http://schemas.openxmlformats.org/drawingml/2006/main">
               <a:ext uri="{FF2B5EF4-FFF2-40B4-BE49-F238E27FC236}">
-                <a16:creationId xmlns:a16="http://schemas.microsoft.com/office/drawing/2014/main" id="{E19D4350-EBAD-4906-9EC4-0F8FED14EE4A}"/>
+                <a16:creationId xmlns:a16="http://schemas.microsoft.com/office/drawing/2014/main" id="{01673ABD-4995-4F51-8339-80803FFECE89}"/>
               </a:ext>
             </a:extLst>
           </p:cNvPr>
@@ -11481,7 +11489,7 @@
           <p:cNvPr id="12" name="">
             <a:extLst xmlns:a="http://schemas.openxmlformats.org/drawingml/2006/main">
               <a:ext uri="{FF2B5EF4-FFF2-40B4-BE49-F238E27FC236}">
-                <a16:creationId xmlns:a16="http://schemas.microsoft.com/office/drawing/2014/main" id="{C1B346D7-19B4-4727-AC4F-E0F4FB29B1BC}"/>
+                <a16:creationId xmlns:a16="http://schemas.microsoft.com/office/drawing/2014/main" id="{0ACCDC9C-145B-4072-B227-708FF2CAF23D}"/>
               </a:ext>
             </a:extLst>
           </p:cNvPr>
@@ -11538,7 +11546,7 @@
           <p:cNvPr id="13" name="">
             <a:extLst xmlns:a="http://schemas.openxmlformats.org/drawingml/2006/main">
               <a:ext uri="{FF2B5EF4-FFF2-40B4-BE49-F238E27FC236}">
-                <a16:creationId xmlns:a16="http://schemas.microsoft.com/office/drawing/2014/main" id="{C7CD0DCD-A4B2-4ADD-B558-BA9B9461D086}"/>
+                <a16:creationId xmlns:a16="http://schemas.microsoft.com/office/drawing/2014/main" id="{CF6998A1-9020-40C7-BE44-FEE956D3DA76}"/>
               </a:ext>
             </a:extLst>
           </p:cNvPr>
@@ -11570,7 +11578,7 @@
           <p:cNvPr id="14" name="">
             <a:extLst xmlns:a="http://schemas.openxmlformats.org/drawingml/2006/main">
               <a:ext uri="{FF2B5EF4-FFF2-40B4-BE49-F238E27FC236}">
-                <a16:creationId xmlns:a16="http://schemas.microsoft.com/office/drawing/2014/main" id="{06E8B92E-C1A8-49C9-975A-2B8CB2258388}"/>
+                <a16:creationId xmlns:a16="http://schemas.microsoft.com/office/drawing/2014/main" id="{97FF753A-EB11-4693-B063-2392A0767C27}"/>
               </a:ext>
             </a:extLst>
           </p:cNvPr>
@@ -11627,7 +11635,7 @@
           <p:cNvPr id="15" name="">
             <a:extLst xmlns:a="http://schemas.openxmlformats.org/drawingml/2006/main">
               <a:ext uri="{FF2B5EF4-FFF2-40B4-BE49-F238E27FC236}">
-                <a16:creationId xmlns:a16="http://schemas.microsoft.com/office/drawing/2014/main" id="{7F04A0DC-E7B4-4AC6-A540-4B72C29AC5A3}"/>
+                <a16:creationId xmlns:a16="http://schemas.microsoft.com/office/drawing/2014/main" id="{F29149C1-3C18-4469-B3A8-2E17FE9F0FB3}"/>
               </a:ext>
             </a:extLst>
           </p:cNvPr>
@@ -11682,7 +11690,7 @@
     </p:spTree>
     <p:extLst>
       <p:ext uri="{BB962C8B-B14F-4D97-AF65-F5344CB8AC3E}">
-        <p14:creationId xmlns:p14="http://schemas.microsoft.com/office/powerpoint/2010/main" val="2055481318"/>
+        <p14:creationId xmlns:p14="http://schemas.microsoft.com/office/powerpoint/2010/main" val="1815608150"/>
       </p:ext>
     </p:extLst>
   </p:cSld>
@@ -11837,7 +11845,7 @@
           <p:cNvPr id="23" name="">
             <a:extLst xmlns:a="http://schemas.openxmlformats.org/drawingml/2006/main">
               <a:ext uri="{FF2B5EF4-FFF2-40B4-BE49-F238E27FC236}">
-                <a16:creationId xmlns:a16="http://schemas.microsoft.com/office/drawing/2014/main" id="{58563BDD-5C4E-462B-9C1A-BF8023739D03}"/>
+                <a16:creationId xmlns:a16="http://schemas.microsoft.com/office/drawing/2014/main" id="{E0D00E94-9B2A-4EB2-BFD2-B086FE1AF51F}"/>
               </a:ext>
             </a:extLst>
           </p:cNvPr>
@@ -11869,7 +11877,7 @@
           <p:cNvPr id="2" name="">
             <a:extLst xmlns:a="http://schemas.openxmlformats.org/drawingml/2006/main">
               <a:ext uri="{FF2B5EF4-FFF2-40B4-BE49-F238E27FC236}">
-                <a16:creationId xmlns:a16="http://schemas.microsoft.com/office/drawing/2014/main" id="{34ECA99A-52EE-4394-AEB8-AB3F5DD94BCE}"/>
+                <a16:creationId xmlns:a16="http://schemas.microsoft.com/office/drawing/2014/main" id="{E690CC9C-7054-4126-B1B7-1772C291FE15}"/>
               </a:ext>
             </a:extLst>
           </p:cNvPr>
@@ -11926,7 +11934,7 @@
           <p:cNvPr id="3" name="">
             <a:extLst xmlns:a="http://schemas.openxmlformats.org/drawingml/2006/main">
               <a:ext uri="{FF2B5EF4-FFF2-40B4-BE49-F238E27FC236}">
-                <a16:creationId xmlns:a16="http://schemas.microsoft.com/office/drawing/2014/main" id="{3AE3838E-EDBA-4BFE-8FB6-DDC897373EB3}"/>
+                <a16:creationId xmlns:a16="http://schemas.microsoft.com/office/drawing/2014/main" id="{90D0787D-95AE-473B-B321-CDC8207C4965}"/>
               </a:ext>
             </a:extLst>
           </p:cNvPr>
@@ -11958,7 +11966,7 @@
           <p:cNvPr id="4" name="">
             <a:extLst xmlns:a="http://schemas.openxmlformats.org/drawingml/2006/main">
               <a:ext uri="{FF2B5EF4-FFF2-40B4-BE49-F238E27FC236}">
-                <a16:creationId xmlns:a16="http://schemas.microsoft.com/office/drawing/2014/main" id="{8E954FAC-0010-45F2-86C1-BB704EC09A1D}"/>
+                <a16:creationId xmlns:a16="http://schemas.microsoft.com/office/drawing/2014/main" id="{6990B00D-C49E-40A6-905B-F4E72A525456}"/>
               </a:ext>
             </a:extLst>
           </p:cNvPr>
@@ -12015,7 +12023,7 @@
           <p:cNvPr id="5" name="">
             <a:extLst xmlns:a="http://schemas.openxmlformats.org/drawingml/2006/main">
               <a:ext uri="{FF2B5EF4-FFF2-40B4-BE49-F238E27FC236}">
-                <a16:creationId xmlns:a16="http://schemas.microsoft.com/office/drawing/2014/main" id="{8F5DA528-FCB8-428A-8CA5-8CA7F27D01F5}"/>
+                <a16:creationId xmlns:a16="http://schemas.microsoft.com/office/drawing/2014/main" id="{933C6DFE-A906-4716-9E6D-D22AEBE29867}"/>
               </a:ext>
             </a:extLst>
           </p:cNvPr>
@@ -12072,7 +12080,7 @@
           <p:cNvPr id="6" name="">
             <a:extLst xmlns:a="http://schemas.openxmlformats.org/drawingml/2006/main">
               <a:ext uri="{FF2B5EF4-FFF2-40B4-BE49-F238E27FC236}">
-                <a16:creationId xmlns:a16="http://schemas.microsoft.com/office/drawing/2014/main" id="{33FA8A20-C145-4679-88EE-47827B3AD2B4}"/>
+                <a16:creationId xmlns:a16="http://schemas.microsoft.com/office/drawing/2014/main" id="{C44A8960-EABD-4F91-822A-93504D6A4D1B}"/>
               </a:ext>
             </a:extLst>
           </p:cNvPr>
@@ -12129,7 +12137,7 @@
           <p:cNvPr id="7" name="">
             <a:extLst xmlns:a="http://schemas.openxmlformats.org/drawingml/2006/main">
               <a:ext uri="{FF2B5EF4-FFF2-40B4-BE49-F238E27FC236}">
-                <a16:creationId xmlns:a16="http://schemas.microsoft.com/office/drawing/2014/main" id="{EB1CAC18-1A3D-4FD2-9045-AF7941351891}"/>
+                <a16:creationId xmlns:a16="http://schemas.microsoft.com/office/drawing/2014/main" id="{5B42BFE3-4145-4626-9D47-EEE82C7EB947}"/>
               </a:ext>
             </a:extLst>
           </p:cNvPr>
@@ -12161,7 +12169,7 @@
           <p:cNvPr id="8" name="">
             <a:extLst xmlns:a="http://schemas.openxmlformats.org/drawingml/2006/main">
               <a:ext uri="{FF2B5EF4-FFF2-40B4-BE49-F238E27FC236}">
-                <a16:creationId xmlns:a16="http://schemas.microsoft.com/office/drawing/2014/main" id="{3D1C662E-080A-4DC8-AA4D-97621D60EFC2}"/>
+                <a16:creationId xmlns:a16="http://schemas.microsoft.com/office/drawing/2014/main" id="{23F1B104-C4AE-4BB7-9B55-277E651C3325}"/>
               </a:ext>
             </a:extLst>
           </p:cNvPr>
@@ -12218,7 +12226,7 @@
           <p:cNvPr id="9" name="">
             <a:extLst xmlns:a="http://schemas.openxmlformats.org/drawingml/2006/main">
               <a:ext uri="{FF2B5EF4-FFF2-40B4-BE49-F238E27FC236}">
-                <a16:creationId xmlns:a16="http://schemas.microsoft.com/office/drawing/2014/main" id="{399300AF-C7CD-43C4-9FEF-BD8022B713D3}"/>
+                <a16:creationId xmlns:a16="http://schemas.microsoft.com/office/drawing/2014/main" id="{6B95208B-7317-447C-95E5-39014FD088B7}"/>
               </a:ext>
             </a:extLst>
           </p:cNvPr>
@@ -12275,7 +12283,7 @@
           <p:cNvPr id="10" name="">
             <a:extLst xmlns:a="http://schemas.openxmlformats.org/drawingml/2006/main">
               <a:ext uri="{FF2B5EF4-FFF2-40B4-BE49-F238E27FC236}">
-                <a16:creationId xmlns:a16="http://schemas.microsoft.com/office/drawing/2014/main" id="{781D710B-958E-475F-A775-86E154FA8E1E}"/>
+                <a16:creationId xmlns:a16="http://schemas.microsoft.com/office/drawing/2014/main" id="{CC65F77E-1F30-47AB-9CDE-F51E520A3E57}"/>
               </a:ext>
             </a:extLst>
           </p:cNvPr>
@@ -12309,7 +12317,7 @@
           <p:cNvPr id="11" name="">
             <a:extLst xmlns:a="http://schemas.openxmlformats.org/drawingml/2006/main">
               <a:ext uri="{FF2B5EF4-FFF2-40B4-BE49-F238E27FC236}">
-                <a16:creationId xmlns:a16="http://schemas.microsoft.com/office/drawing/2014/main" id="{F79B61C9-34BA-4E98-9467-70E310D35C14}"/>
+                <a16:creationId xmlns:a16="http://schemas.microsoft.com/office/drawing/2014/main" id="{BEB1B25C-8FC4-4178-9AEA-10203BC9C673}"/>
               </a:ext>
             </a:extLst>
           </p:cNvPr>
@@ -12341,7 +12349,7 @@
           <p:cNvPr id="12" name="">
             <a:extLst xmlns:a="http://schemas.openxmlformats.org/drawingml/2006/main">
               <a:ext uri="{FF2B5EF4-FFF2-40B4-BE49-F238E27FC236}">
-                <a16:creationId xmlns:a16="http://schemas.microsoft.com/office/drawing/2014/main" id="{60172D17-B84C-481B-B518-B8B1ED2A21C5}"/>
+                <a16:creationId xmlns:a16="http://schemas.microsoft.com/office/drawing/2014/main" id="{A991BC80-EF81-405A-A8DA-EDEF5D0BAF63}"/>
               </a:ext>
             </a:extLst>
           </p:cNvPr>
@@ -12398,7 +12406,7 @@
           <p:cNvPr id="13" name="">
             <a:extLst xmlns:a="http://schemas.openxmlformats.org/drawingml/2006/main">
               <a:ext uri="{FF2B5EF4-FFF2-40B4-BE49-F238E27FC236}">
-                <a16:creationId xmlns:a16="http://schemas.microsoft.com/office/drawing/2014/main" id="{A12F2E4C-B518-443D-9EDC-D436018A6B74}"/>
+                <a16:creationId xmlns:a16="http://schemas.microsoft.com/office/drawing/2014/main" id="{4EC55CDF-BCB9-4321-AF49-E8916EBD323A}"/>
               </a:ext>
             </a:extLst>
           </p:cNvPr>
@@ -12455,7 +12463,7 @@
           <p:cNvPr id="14" name="">
             <a:extLst xmlns:a="http://schemas.openxmlformats.org/drawingml/2006/main">
               <a:ext uri="{FF2B5EF4-FFF2-40B4-BE49-F238E27FC236}">
-                <a16:creationId xmlns:a16="http://schemas.microsoft.com/office/drawing/2014/main" id="{60D3BE2E-1557-469D-AF18-AABC83AFBBBD}"/>
+                <a16:creationId xmlns:a16="http://schemas.microsoft.com/office/drawing/2014/main" id="{74321ED5-2B12-42AF-B2C5-281830CAE61E}"/>
               </a:ext>
             </a:extLst>
           </p:cNvPr>
@@ -12489,7 +12497,7 @@
           <p:cNvPr id="15" name="">
             <a:extLst xmlns:a="http://schemas.openxmlformats.org/drawingml/2006/main">
               <a:ext uri="{FF2B5EF4-FFF2-40B4-BE49-F238E27FC236}">
-                <a16:creationId xmlns:a16="http://schemas.microsoft.com/office/drawing/2014/main" id="{AC83FF1B-3DDC-4004-BD0F-CFDCE168CF98}"/>
+                <a16:creationId xmlns:a16="http://schemas.microsoft.com/office/drawing/2014/main" id="{CCA9BBBE-79FA-49D0-8C10-57FE94114238}"/>
               </a:ext>
             </a:extLst>
           </p:cNvPr>
@@ -12521,7 +12529,7 @@
           <p:cNvPr id="16" name="">
             <a:extLst xmlns:a="http://schemas.openxmlformats.org/drawingml/2006/main">
               <a:ext uri="{FF2B5EF4-FFF2-40B4-BE49-F238E27FC236}">
-                <a16:creationId xmlns:a16="http://schemas.microsoft.com/office/drawing/2014/main" id="{93C705C0-036F-456F-8A38-D699B212B4C1}"/>
+                <a16:creationId xmlns:a16="http://schemas.microsoft.com/office/drawing/2014/main" id="{62863A20-441B-41C3-97AD-9F50A6983DE8}"/>
               </a:ext>
             </a:extLst>
           </p:cNvPr>
@@ -12578,7 +12586,7 @@
           <p:cNvPr id="17" name="">
             <a:extLst xmlns:a="http://schemas.openxmlformats.org/drawingml/2006/main">
               <a:ext uri="{FF2B5EF4-FFF2-40B4-BE49-F238E27FC236}">
-                <a16:creationId xmlns:a16="http://schemas.microsoft.com/office/drawing/2014/main" id="{7F734F26-B612-4DC8-9F83-CEEFD3962A4E}"/>
+                <a16:creationId xmlns:a16="http://schemas.microsoft.com/office/drawing/2014/main" id="{035E7097-1AA8-4795-9FA5-14E875238485}"/>
               </a:ext>
             </a:extLst>
           </p:cNvPr>
@@ -12635,7 +12643,7 @@
           <p:cNvPr id="18" name="">
             <a:extLst xmlns:a="http://schemas.openxmlformats.org/drawingml/2006/main">
               <a:ext uri="{FF2B5EF4-FFF2-40B4-BE49-F238E27FC236}">
-                <a16:creationId xmlns:a16="http://schemas.microsoft.com/office/drawing/2014/main" id="{B55A1B84-2AD0-403B-BDFF-E30D5604AA9D}"/>
+                <a16:creationId xmlns:a16="http://schemas.microsoft.com/office/drawing/2014/main" id="{E06AC790-978D-4A78-93BC-896F9D952F11}"/>
               </a:ext>
             </a:extLst>
           </p:cNvPr>
@@ -12669,7 +12677,7 @@
           <p:cNvPr id="19" name="">
             <a:extLst xmlns:a="http://schemas.openxmlformats.org/drawingml/2006/main">
               <a:ext uri="{FF2B5EF4-FFF2-40B4-BE49-F238E27FC236}">
-                <a16:creationId xmlns:a16="http://schemas.microsoft.com/office/drawing/2014/main" id="{1A0AD252-674A-48AC-BE02-076921455A8E}"/>
+                <a16:creationId xmlns:a16="http://schemas.microsoft.com/office/drawing/2014/main" id="{95CDC48B-2F35-4FF0-A415-63F32143BB0C}"/>
               </a:ext>
             </a:extLst>
           </p:cNvPr>
@@ -12701,7 +12709,7 @@
           <p:cNvPr id="20" name="">
             <a:extLst xmlns:a="http://schemas.openxmlformats.org/drawingml/2006/main">
               <a:ext uri="{FF2B5EF4-FFF2-40B4-BE49-F238E27FC236}">
-                <a16:creationId xmlns:a16="http://schemas.microsoft.com/office/drawing/2014/main" id="{839CB676-FB3E-4FF2-8185-A6D917B50D11}"/>
+                <a16:creationId xmlns:a16="http://schemas.microsoft.com/office/drawing/2014/main" id="{AE4BCC43-AB0B-4179-BF79-C2C34637F34C}"/>
               </a:ext>
             </a:extLst>
           </p:cNvPr>
@@ -12758,7 +12766,7 @@
           <p:cNvPr id="21" name="">
             <a:extLst xmlns:a="http://schemas.openxmlformats.org/drawingml/2006/main">
               <a:ext uri="{FF2B5EF4-FFF2-40B4-BE49-F238E27FC236}">
-                <a16:creationId xmlns:a16="http://schemas.microsoft.com/office/drawing/2014/main" id="{084EE779-5711-42E8-9D66-CB40231F3226}"/>
+                <a16:creationId xmlns:a16="http://schemas.microsoft.com/office/drawing/2014/main" id="{348972B6-6814-4B70-9288-800BBE9886B5}"/>
               </a:ext>
             </a:extLst>
           </p:cNvPr>
@@ -12815,7 +12823,7 @@
           <p:cNvPr id="22" name="">
             <a:extLst xmlns:a="http://schemas.openxmlformats.org/drawingml/2006/main">
               <a:ext uri="{FF2B5EF4-FFF2-40B4-BE49-F238E27FC236}">
-                <a16:creationId xmlns:a16="http://schemas.microsoft.com/office/drawing/2014/main" id="{A8D898BB-0398-4C24-ABAB-B3C5188F1FEF}"/>
+                <a16:creationId xmlns:a16="http://schemas.microsoft.com/office/drawing/2014/main" id="{9B853C6E-8F9C-4840-9D5E-B081A7B99D61}"/>
               </a:ext>
             </a:extLst>
           </p:cNvPr>
@@ -12870,7 +12878,7 @@
     </p:spTree>
     <p:extLst>
       <p:ext uri="{BB962C8B-B14F-4D97-AF65-F5344CB8AC3E}">
-        <p14:creationId xmlns:p14="http://schemas.microsoft.com/office/powerpoint/2010/main" val="617677806"/>
+        <p14:creationId xmlns:p14="http://schemas.microsoft.com/office/powerpoint/2010/main" val="1304032373"/>
       </p:ext>
     </p:extLst>
   </p:cSld>
@@ -13071,7 +13079,7 @@
           <p:cNvPr id="22" name="">
             <a:extLst xmlns:a="http://schemas.openxmlformats.org/drawingml/2006/main">
               <a:ext uri="{FF2B5EF4-FFF2-40B4-BE49-F238E27FC236}">
-                <a16:creationId xmlns:a16="http://schemas.microsoft.com/office/drawing/2014/main" id="{B8CC29DB-F59E-453F-90AC-442C6C5DFD4A}"/>
+                <a16:creationId xmlns:a16="http://schemas.microsoft.com/office/drawing/2014/main" id="{B865D670-52C3-4C89-9109-1EC1738246E0}"/>
               </a:ext>
             </a:extLst>
           </p:cNvPr>
@@ -13103,7 +13111,7 @@
           <p:cNvPr id="2" name="">
             <a:extLst xmlns:a="http://schemas.openxmlformats.org/drawingml/2006/main">
               <a:ext uri="{FF2B5EF4-FFF2-40B4-BE49-F238E27FC236}">
-                <a16:creationId xmlns:a16="http://schemas.microsoft.com/office/drawing/2014/main" id="{ED99CB0E-3874-4DB0-9600-6F96A1A3AD3E}"/>
+                <a16:creationId xmlns:a16="http://schemas.microsoft.com/office/drawing/2014/main" id="{C1F6FD51-0498-4541-83C9-3A946641E66F}"/>
               </a:ext>
             </a:extLst>
           </p:cNvPr>
@@ -13160,7 +13168,7 @@
           <p:cNvPr id="3" name="">
             <a:extLst xmlns:a="http://schemas.openxmlformats.org/drawingml/2006/main">
               <a:ext uri="{FF2B5EF4-FFF2-40B4-BE49-F238E27FC236}">
-                <a16:creationId xmlns:a16="http://schemas.microsoft.com/office/drawing/2014/main" id="{AFB4DC22-B279-4671-82B5-8E988330B1A9}"/>
+                <a16:creationId xmlns:a16="http://schemas.microsoft.com/office/drawing/2014/main" id="{B537E4B2-6A3E-4F3A-9B03-BB09F9112BEB}"/>
               </a:ext>
             </a:extLst>
           </p:cNvPr>
@@ -13192,7 +13200,7 @@
           <p:cNvPr id="4" name="">
             <a:extLst xmlns:a="http://schemas.openxmlformats.org/drawingml/2006/main">
               <a:ext uri="{FF2B5EF4-FFF2-40B4-BE49-F238E27FC236}">
-                <a16:creationId xmlns:a16="http://schemas.microsoft.com/office/drawing/2014/main" id="{49FDD1D1-42B8-4F6B-B01E-3BA5A64616CB}"/>
+                <a16:creationId xmlns:a16="http://schemas.microsoft.com/office/drawing/2014/main" id="{C7D626C0-262F-49E5-B4A5-EFCD48B3F3F4}"/>
               </a:ext>
             </a:extLst>
           </p:cNvPr>
@@ -13249,7 +13257,7 @@
           <p:cNvPr id="5" name="">
             <a:extLst xmlns:a="http://schemas.openxmlformats.org/drawingml/2006/main">
               <a:ext uri="{FF2B5EF4-FFF2-40B4-BE49-F238E27FC236}">
-                <a16:creationId xmlns:a16="http://schemas.microsoft.com/office/drawing/2014/main" id="{07BFA119-2EC2-46A1-BF8E-45F382FB13EF}"/>
+                <a16:creationId xmlns:a16="http://schemas.microsoft.com/office/drawing/2014/main" id="{1A5AD8C7-2FD0-4305-A6DB-47890E8FFF96}"/>
               </a:ext>
             </a:extLst>
           </p:cNvPr>
@@ -13306,7 +13314,7 @@
           <p:cNvPr id="6" name="">
             <a:extLst xmlns:a="http://schemas.openxmlformats.org/drawingml/2006/main">
               <a:ext uri="{FF2B5EF4-FFF2-40B4-BE49-F238E27FC236}">
-                <a16:creationId xmlns:a16="http://schemas.microsoft.com/office/drawing/2014/main" id="{D9DFE785-9A22-4568-83BD-CF10C54F39E0}"/>
+                <a16:creationId xmlns:a16="http://schemas.microsoft.com/office/drawing/2014/main" id="{34A8E6C5-2D8D-4B96-B849-271C0F692E94}"/>
               </a:ext>
             </a:extLst>
           </p:cNvPr>
@@ -13363,7 +13371,7 @@
           <p:cNvPr id="7" name="">
             <a:extLst xmlns:a="http://schemas.openxmlformats.org/drawingml/2006/main">
               <a:ext uri="{FF2B5EF4-FFF2-40B4-BE49-F238E27FC236}">
-                <a16:creationId xmlns:a16="http://schemas.microsoft.com/office/drawing/2014/main" id="{091B3F61-9556-4F3F-86CA-053104822D71}"/>
+                <a16:creationId xmlns:a16="http://schemas.microsoft.com/office/drawing/2014/main" id="{500FA15A-33BB-4C0A-98FE-BBEB7D734078}"/>
               </a:ext>
             </a:extLst>
           </p:cNvPr>
@@ -13395,7 +13403,7 @@
           <p:cNvPr id="8" name="">
             <a:extLst xmlns:a="http://schemas.openxmlformats.org/drawingml/2006/main">
               <a:ext uri="{FF2B5EF4-FFF2-40B4-BE49-F238E27FC236}">
-                <a16:creationId xmlns:a16="http://schemas.microsoft.com/office/drawing/2014/main" id="{3AF26C94-114E-4D95-92EC-4422D585BEC9}"/>
+                <a16:creationId xmlns:a16="http://schemas.microsoft.com/office/drawing/2014/main" id="{AEACB18D-DB28-4ACC-A48E-15307F089843}"/>
               </a:ext>
             </a:extLst>
           </p:cNvPr>
@@ -13452,7 +13460,7 @@
           <p:cNvPr id="9" name="">
             <a:extLst xmlns:a="http://schemas.openxmlformats.org/drawingml/2006/main">
               <a:ext uri="{FF2B5EF4-FFF2-40B4-BE49-F238E27FC236}">
-                <a16:creationId xmlns:a16="http://schemas.microsoft.com/office/drawing/2014/main" id="{83CE618D-D67B-49F9-A5DF-D8E624ECBE68}"/>
+                <a16:creationId xmlns:a16="http://schemas.microsoft.com/office/drawing/2014/main" id="{2DB91964-4894-4953-9529-B7B00435BB6B}"/>
               </a:ext>
             </a:extLst>
           </p:cNvPr>
@@ -13509,7 +13517,7 @@
           <p:cNvPr id="10" name="">
             <a:extLst xmlns:a="http://schemas.openxmlformats.org/drawingml/2006/main">
               <a:ext uri="{FF2B5EF4-FFF2-40B4-BE49-F238E27FC236}">
-                <a16:creationId xmlns:a16="http://schemas.microsoft.com/office/drawing/2014/main" id="{D98FC489-7258-4F0E-8D53-8B2D3291E83D}"/>
+                <a16:creationId xmlns:a16="http://schemas.microsoft.com/office/drawing/2014/main" id="{428B3EE9-DF4D-4F1A-863F-9DDEFC0DC7B0}"/>
               </a:ext>
             </a:extLst>
           </p:cNvPr>
@@ -13543,7 +13551,7 @@
           <p:cNvPr id="11" name="">
             <a:extLst xmlns:a="http://schemas.openxmlformats.org/drawingml/2006/main">
               <a:ext uri="{FF2B5EF4-FFF2-40B4-BE49-F238E27FC236}">
-                <a16:creationId xmlns:a16="http://schemas.microsoft.com/office/drawing/2014/main" id="{6056A81D-54CE-4E83-844C-11D835E459B4}"/>
+                <a16:creationId xmlns:a16="http://schemas.microsoft.com/office/drawing/2014/main" id="{A689451F-D298-4DBF-A58A-836D4F00BD27}"/>
               </a:ext>
             </a:extLst>
           </p:cNvPr>
@@ -13575,7 +13583,7 @@
           <p:cNvPr id="12" name="">
             <a:extLst xmlns:a="http://schemas.openxmlformats.org/drawingml/2006/main">
               <a:ext uri="{FF2B5EF4-FFF2-40B4-BE49-F238E27FC236}">
-                <a16:creationId xmlns:a16="http://schemas.microsoft.com/office/drawing/2014/main" id="{E1BE218B-C8E8-41C0-A076-9CB0B6E5D015}"/>
+                <a16:creationId xmlns:a16="http://schemas.microsoft.com/office/drawing/2014/main" id="{91C93D6D-D114-4B42-B96B-8BA9E23A72ED}"/>
               </a:ext>
             </a:extLst>
           </p:cNvPr>
@@ -13632,7 +13640,7 @@
           <p:cNvPr id="13" name="">
             <a:extLst xmlns:a="http://schemas.openxmlformats.org/drawingml/2006/main">
               <a:ext uri="{FF2B5EF4-FFF2-40B4-BE49-F238E27FC236}">
-                <a16:creationId xmlns:a16="http://schemas.microsoft.com/office/drawing/2014/main" id="{B709BB89-6CFC-46FB-A074-CFE2DAB5D2EE}"/>
+                <a16:creationId xmlns:a16="http://schemas.microsoft.com/office/drawing/2014/main" id="{D6BF87CB-8B01-4C01-8523-A19EEC32E01A}"/>
               </a:ext>
             </a:extLst>
           </p:cNvPr>
@@ -13689,7 +13697,7 @@
           <p:cNvPr id="14" name="">
             <a:extLst xmlns:a="http://schemas.openxmlformats.org/drawingml/2006/main">
               <a:ext uri="{FF2B5EF4-FFF2-40B4-BE49-F238E27FC236}">
-                <a16:creationId xmlns:a16="http://schemas.microsoft.com/office/drawing/2014/main" id="{60498B4A-1038-4162-8CF6-F7A40776D75E}"/>
+                <a16:creationId xmlns:a16="http://schemas.microsoft.com/office/drawing/2014/main" id="{85C2451D-9765-4EF3-B692-CA1357116B99}"/>
               </a:ext>
             </a:extLst>
           </p:cNvPr>
@@ -13723,7 +13731,7 @@
           <p:cNvPr id="15" name="">
             <a:extLst xmlns:a="http://schemas.openxmlformats.org/drawingml/2006/main">
               <a:ext uri="{FF2B5EF4-FFF2-40B4-BE49-F238E27FC236}">
-                <a16:creationId xmlns:a16="http://schemas.microsoft.com/office/drawing/2014/main" id="{7B4FFEEA-C4B8-4541-94D7-5138E7ECC6F5}"/>
+                <a16:creationId xmlns:a16="http://schemas.microsoft.com/office/drawing/2014/main" id="{899E7046-140D-4292-8766-752675709B68}"/>
               </a:ext>
             </a:extLst>
           </p:cNvPr>
@@ -13755,7 +13763,7 @@
           <p:cNvPr id="16" name="">
             <a:extLst xmlns:a="http://schemas.openxmlformats.org/drawingml/2006/main">
               <a:ext uri="{FF2B5EF4-FFF2-40B4-BE49-F238E27FC236}">
-                <a16:creationId xmlns:a16="http://schemas.microsoft.com/office/drawing/2014/main" id="{48212080-E030-4DD4-BD06-5CFC4F672BBE}"/>
+                <a16:creationId xmlns:a16="http://schemas.microsoft.com/office/drawing/2014/main" id="{30B4FAFA-F7C6-41A8-8CAA-3DDA98CE1FA6}"/>
               </a:ext>
             </a:extLst>
           </p:cNvPr>
@@ -13812,7 +13820,7 @@
           <p:cNvPr id="17" name="">
             <a:extLst xmlns:a="http://schemas.openxmlformats.org/drawingml/2006/main">
               <a:ext uri="{FF2B5EF4-FFF2-40B4-BE49-F238E27FC236}">
-                <a16:creationId xmlns:a16="http://schemas.microsoft.com/office/drawing/2014/main" id="{1F7E7DA1-6E66-4321-8FD4-CE4DD958A9C7}"/>
+                <a16:creationId xmlns:a16="http://schemas.microsoft.com/office/drawing/2014/main" id="{497FD073-C8D5-408A-AF19-AB195E53EBF7}"/>
               </a:ext>
             </a:extLst>
           </p:cNvPr>
@@ -13869,7 +13877,7 @@
           <p:cNvPr id="18" name="">
             <a:extLst xmlns:a="http://schemas.openxmlformats.org/drawingml/2006/main">
               <a:ext uri="{FF2B5EF4-FFF2-40B4-BE49-F238E27FC236}">
-                <a16:creationId xmlns:a16="http://schemas.microsoft.com/office/drawing/2014/main" id="{956DAB50-C104-4F59-964F-7B0B0D6B8469}"/>
+                <a16:creationId xmlns:a16="http://schemas.microsoft.com/office/drawing/2014/main" id="{6A2FBAA8-516A-4716-AE43-FC4A3D561104}"/>
               </a:ext>
             </a:extLst>
           </p:cNvPr>
@@ -13903,7 +13911,7 @@
           <p:cNvPr id="19" name="">
             <a:extLst xmlns:a="http://schemas.openxmlformats.org/drawingml/2006/main">
               <a:ext uri="{FF2B5EF4-FFF2-40B4-BE49-F238E27FC236}">
-                <a16:creationId xmlns:a16="http://schemas.microsoft.com/office/drawing/2014/main" id="{A76A4911-AC55-4B10-AAF5-939E154FB92B}"/>
+                <a16:creationId xmlns:a16="http://schemas.microsoft.com/office/drawing/2014/main" id="{D13B1282-4FF0-4B92-BC78-A17F0ECBFD3E}"/>
               </a:ext>
             </a:extLst>
           </p:cNvPr>
@@ -13935,7 +13943,7 @@
           <p:cNvPr id="20" name="">
             <a:extLst xmlns:a="http://schemas.openxmlformats.org/drawingml/2006/main">
               <a:ext uri="{FF2B5EF4-FFF2-40B4-BE49-F238E27FC236}">
-                <a16:creationId xmlns:a16="http://schemas.microsoft.com/office/drawing/2014/main" id="{B84C9EBE-EA8A-447A-8752-7AF1016F8897}"/>
+                <a16:creationId xmlns:a16="http://schemas.microsoft.com/office/drawing/2014/main" id="{E44A067B-7A2E-43FE-AE79-CF28A9C83CF7}"/>
               </a:ext>
             </a:extLst>
           </p:cNvPr>
@@ -13992,7 +14000,7 @@
           <p:cNvPr id="21" name="">
             <a:extLst xmlns:a="http://schemas.openxmlformats.org/drawingml/2006/main">
               <a:ext uri="{FF2B5EF4-FFF2-40B4-BE49-F238E27FC236}">
-                <a16:creationId xmlns:a16="http://schemas.microsoft.com/office/drawing/2014/main" id="{2067E705-0F11-4FEF-809B-C638ACB8CDE3}"/>
+                <a16:creationId xmlns:a16="http://schemas.microsoft.com/office/drawing/2014/main" id="{FAFED6FC-48F4-4CA4-97CA-976075A0FD58}"/>
               </a:ext>
             </a:extLst>
           </p:cNvPr>
@@ -14047,7 +14055,7 @@
     </p:spTree>
     <p:extLst>
       <p:ext uri="{BB962C8B-B14F-4D97-AF65-F5344CB8AC3E}">
-        <p14:creationId xmlns:p14="http://schemas.microsoft.com/office/powerpoint/2010/main" val="637830896"/>
+        <p14:creationId xmlns:p14="http://schemas.microsoft.com/office/powerpoint/2010/main" val="553072642"/>
       </p:ext>
     </p:extLst>
   </p:cSld>
